--- a/results/resultados.pptx
+++ b/results/resultados.pptx
@@ -15,7 +15,6 @@
     <p:sldId id="267" r:id="rId9"/>
     <p:sldId id="270" r:id="rId10"/>
     <p:sldId id="271" r:id="rId11"/>
-    <p:sldId id="272" r:id="rId12"/>
   </p:sldIdLst>
   <p:sldSz cx="12192000" cy="6858000"/>
   <p:notesSz cx="6858000" cy="9144000"/>
@@ -137,7 +136,6 @@
             <p14:sldId id="267"/>
             <p14:sldId id="270"/>
             <p14:sldId id="271"/>
-            <p14:sldId id="272"/>
           </p14:sldIdLst>
         </p14:section>
       </p14:sectionLst>
@@ -4884,112 +4882,6 @@
 </p:sld>
 </file>
 
-<file path=ppt/slides/slide11.xml><?xml version="1.0" encoding="utf-8"?>
-<p:sld xmlns:a="http://schemas.openxmlformats.org/drawingml/2006/main" xmlns:r="http://schemas.openxmlformats.org/officeDocument/2006/relationships" xmlns:p="http://schemas.openxmlformats.org/presentationml/2006/main">
-  <p:cSld>
-    <p:spTree>
-      <p:nvGrpSpPr>
-        <p:cNvPr id="1" name=""/>
-        <p:cNvGrpSpPr/>
-        <p:nvPr/>
-      </p:nvGrpSpPr>
-      <p:grpSpPr>
-        <a:xfrm>
-          <a:off x="0" y="0"/>
-          <a:ext cx="0" cy="0"/>
-          <a:chOff x="0" y="0"/>
-          <a:chExt cx="0" cy="0"/>
-        </a:xfrm>
-      </p:grpSpPr>
-      <p:sp>
-        <p:nvSpPr>
-          <p:cNvPr id="5" name="CuadroTexto 4">
-            <a:extLst>
-              <a:ext uri="{FF2B5EF4-FFF2-40B4-BE49-F238E27FC236}">
-                <a16:creationId xmlns:a16="http://schemas.microsoft.com/office/drawing/2014/main" id="{5A2B6FE2-15BB-0C1F-3B4C-07D7A02AE8FF}"/>
-              </a:ext>
-            </a:extLst>
-          </p:cNvPr>
-          <p:cNvSpPr txBox="1"/>
-          <p:nvPr/>
-        </p:nvSpPr>
-        <p:spPr>
-          <a:xfrm>
-            <a:off x="3048953" y="1997839"/>
-            <a:ext cx="6097904" cy="2862322"/>
-          </a:xfrm>
-          <a:prstGeom prst="rect">
-            <a:avLst/>
-          </a:prstGeom>
-          <a:noFill/>
-        </p:spPr>
-        <p:txBody>
-          <a:bodyPr wrap="square">
-            <a:spAutoFit/>
-          </a:bodyPr>
-          <a:lstStyle/>
-          <a:p>
-            <a:r>
-              <a:rPr lang="es-ES" dirty="0"/>
-              <a:t>Lo más valioso de esto para tu informe: </a:t>
-            </a:r>
-            <a:r>
-              <a:rPr lang="es-ES" b="1" dirty="0"/>
-              <a:t>dos corridas independientes, en momentos distintos, dieron resultados casi idénticos</a:t>
-            </a:r>
-            <a:r>
-              <a:rPr lang="es-ES" dirty="0"/>
-              <a:t> (core_p95 ~0.02ms en ambas, </a:t>
-            </a:r>
-            <a:r>
-              <a:rPr lang="es-ES" dirty="0" err="1"/>
-              <a:t>matches</a:t>
-            </a:r>
-            <a:r>
-              <a:rPr lang="es-ES" dirty="0"/>
-              <a:t>/min ~4.6-4.7k en ambas). Eso no es casualidad — es evidencia de que el comportamiento es </a:t>
-            </a:r>
-            <a:r>
-              <a:rPr lang="es-ES" b="1" dirty="0"/>
-              <a:t>reproducible</a:t>
-            </a:r>
-            <a:r>
-              <a:rPr lang="es-ES" dirty="0"/>
-              <a:t>, no un resultado aislado que podría haber sido suerte. Con esto y el CSV de latencia que ya tienes, cubres las cuatro piezas de la hipótesis de escalabilidad (órdenes/min, </a:t>
-            </a:r>
-            <a:r>
-              <a:rPr lang="es-ES" dirty="0" err="1"/>
-              <a:t>matches</a:t>
-            </a:r>
-            <a:r>
-              <a:rPr lang="es-ES" dirty="0"/>
-              <a:t>/min, core_p95, y solo falta el % de error de </a:t>
-            </a:r>
-            <a:r>
-              <a:rPr lang="es-ES" dirty="0" err="1"/>
-              <a:t>Locust</a:t>
-            </a:r>
-            <a:r>
-              <a:rPr lang="es-ES" dirty="0"/>
-              <a:t> de esta corrida específica para cerrar el círculo del todo)</a:t>
-            </a:r>
-            <a:endParaRPr lang="es-CO" dirty="0"/>
-          </a:p>
-        </p:txBody>
-      </p:sp>
-    </p:spTree>
-    <p:extLst>
-      <p:ext uri="{BB962C8B-B14F-4D97-AF65-F5344CB8AC3E}">
-        <p14:creationId xmlns:p14="http://schemas.microsoft.com/office/powerpoint/2010/main" val="2247377054"/>
-      </p:ext>
-    </p:extLst>
-  </p:cSld>
-  <p:clrMapOvr>
-    <a:masterClrMapping/>
-  </p:clrMapOvr>
-</p:sld>
-</file>
-
 <file path=ppt/slides/slide2.xml><?xml version="1.0" encoding="utf-8"?>
 <p:sld xmlns:a="http://schemas.openxmlformats.org/drawingml/2006/main" xmlns:r="http://schemas.openxmlformats.org/officeDocument/2006/relationships" xmlns:p="http://schemas.openxmlformats.org/presentationml/2006/main">
   <p:cSld>
@@ -7036,7 +6928,7 @@
         </p:nvSpPr>
         <p:spPr>
           <a:xfrm>
-            <a:off x="5870379" y="3817518"/>
+            <a:off x="5870379" y="3982997"/>
             <a:ext cx="6321621" cy="2308324"/>
           </a:xfrm>
           <a:prstGeom prst="rect">
@@ -7330,7 +7222,7 @@
         <p:spPr>
           <a:xfrm>
             <a:off x="5825339" y="1537313"/>
-            <a:ext cx="6138862" cy="1477328"/>
+            <a:ext cx="6138862" cy="1200329"/>
           </a:xfrm>
           <a:prstGeom prst="rect">
             <a:avLst/>
@@ -7352,18 +7244,11 @@
               <a:t>FASE 1: CUMPLE </a:t>
             </a:r>
             <a:r>
-              <a:rPr lang="es-ES" b="0" i="0" dirty="0" err="1">
+              <a:rPr lang="es-ES" b="0" i="0" dirty="0">
                 <a:effectLst/>
                 <a:latin typeface="anthropic-sans"/>
               </a:rPr>
-              <a:t>Cumple</a:t>
-            </a:r>
-            <a:r>
-              <a:rPr lang="es-ES" b="0" i="0" dirty="0">
-                <a:effectLst/>
-                <a:latin typeface="anthropic-sans"/>
-              </a:rPr>
-              <a:t> con margen amplio, sin ningún </a:t>
+              <a:t>con margen amplio, sin ningún </a:t>
             </a:r>
             <a:r>
               <a:rPr lang="es-ES" b="0" i="0" dirty="0" err="1">
@@ -8639,7 +8524,7 @@
         <p:spPr>
           <a:xfrm>
             <a:off x="227799" y="365103"/>
-            <a:ext cx="9397982" cy="646331"/>
+            <a:ext cx="6230874" cy="646331"/>
           </a:xfrm>
           <a:prstGeom prst="rect">
             <a:avLst/>
@@ -8886,8 +8771,8 @@
         </p:nvSpPr>
         <p:spPr>
           <a:xfrm>
-            <a:off x="13872059" y="3583283"/>
-            <a:ext cx="6138862" cy="1477328"/>
+            <a:off x="6655664" y="2691792"/>
+            <a:ext cx="5465216" cy="4247317"/>
           </a:xfrm>
           <a:prstGeom prst="rect">
             <a:avLst/>
@@ -8900,99 +8785,143 @@
           </a:bodyPr>
           <a:lstStyle/>
           <a:p>
-            <a:pPr algn="l"/>
+            <a:pPr marL="0" marR="0" lvl="0" indent="0" algn="l" defTabSz="914400" rtl="0" eaLnBrk="0" fontAlgn="base" latinLnBrk="0" hangingPunct="0">
+              <a:lnSpc>
+                <a:spcPct val="100000"/>
+              </a:lnSpc>
+              <a:spcBef>
+                <a:spcPct val="0"/>
+              </a:spcBef>
+              <a:spcAft>
+                <a:spcPct val="0"/>
+              </a:spcAft>
+              <a:buClrTx/>
+              <a:buSzTx/>
+              <a:buFontTx/>
+              <a:buNone/>
+              <a:tabLst/>
+            </a:pPr>
             <a:r>
               <a:rPr lang="es-ES" b="1" i="0" dirty="0">
                 <a:effectLst/>
                 <a:latin typeface="anthropic-sans"/>
               </a:rPr>
-              <a:t>FASE 1: CUMPLE </a:t>
-            </a:r>
-            <a:r>
-              <a:rPr lang="es-ES" b="0" i="0" dirty="0" err="1">
-                <a:effectLst/>
-                <a:latin typeface="anthropic-sans"/>
-              </a:rPr>
-              <a:t>Cumple</a:t>
-            </a:r>
-            <a:r>
-              <a:rPr lang="es-ES" b="0" i="0" dirty="0">
-                <a:effectLst/>
-                <a:latin typeface="anthropic-sans"/>
-              </a:rPr>
-              <a:t> con margen amplio, sin ningún </a:t>
-            </a:r>
-            <a:r>
-              <a:rPr lang="es-ES" b="0" i="0" dirty="0" err="1">
-                <a:effectLst/>
-                <a:latin typeface="anthropic-sans"/>
-              </a:rPr>
-              <a:t>outlier</a:t>
-            </a:r>
-            <a:r>
-              <a:rPr lang="es-ES" b="0" i="0" dirty="0">
-                <a:effectLst/>
-                <a:latin typeface="anthropic-sans"/>
-              </a:rPr>
-              <a:t> esta vez.</a:t>
-            </a:r>
-          </a:p>
-          <a:p>
-            <a:pPr algn="l"/>
-            <a:r>
-              <a:rPr lang="es-ES" b="0" i="0" dirty="0">
-                <a:effectLst/>
-                <a:latin typeface="anthropic-sans"/>
-              </a:rPr>
-              <a:t>p95 = 20.36ms (objetivo: &lt;=350ms) — 17x mejor que el límite</a:t>
-            </a:r>
-          </a:p>
-          <a:p>
-            <a:pPr algn="l"/>
-            <a:r>
-              <a:rPr lang="es-ES" b="0" i="0" dirty="0">
-                <a:effectLst/>
-                <a:latin typeface="anthropic-sans"/>
-              </a:rPr>
-              <a:t>0 de 29.898 muestras superó 350ms</a:t>
-            </a:r>
-          </a:p>
-          <a:p>
-            <a:pPr algn="l"/>
-            <a:r>
-              <a:rPr lang="es-ES" b="0" i="0" dirty="0">
-                <a:effectLst/>
-                <a:latin typeface="anthropic-sans"/>
-              </a:rPr>
-              <a:t>≈49.8 confirmaciones/s ≈ 24.9 </a:t>
-            </a:r>
-            <a:r>
-              <a:rPr lang="es-ES" b="0" i="0" dirty="0" err="1">
-                <a:effectLst/>
-                <a:latin typeface="anthropic-sans"/>
+              <a:t>FASE 2: CUMPLE </a:t>
+            </a:r>
+            <a:r>
+              <a:rPr lang="es-CO" altLang="es-CO" kern="100" dirty="0">
+                <a:latin typeface="Aptos" panose="020B0004020202020204" pitchFamily="34" charset="0"/>
+                <a:cs typeface="Times New Roman" panose="02020603050405020304" pitchFamily="18" charset="0"/>
+              </a:rPr>
+              <a:t>p95 = 6.60ms sobre 169.232 muestras (≈94 confirmaciones/s ≈ 2.821 </a:t>
+            </a:r>
+            <a:r>
+              <a:rPr lang="es-CO" altLang="es-CO" kern="100" dirty="0" err="1">
+                <a:latin typeface="Aptos" panose="020B0004020202020204" pitchFamily="34" charset="0"/>
+                <a:cs typeface="Times New Roman" panose="02020603050405020304" pitchFamily="18" charset="0"/>
               </a:rPr>
               <a:t>matches</a:t>
             </a:r>
             <a:r>
-              <a:rPr lang="es-ES" b="0" i="0" dirty="0">
-                <a:effectLst/>
-                <a:latin typeface="anthropic-sans"/>
-              </a:rPr>
-              <a:t>/s ≈ 1.494 </a:t>
-            </a:r>
-            <a:r>
-              <a:rPr lang="es-ES" b="0" i="0" dirty="0" err="1">
-                <a:effectLst/>
-                <a:latin typeface="anthropic-sans"/>
-              </a:rPr>
-              <a:t>matches</a:t>
-            </a:r>
-            <a:r>
-              <a:rPr lang="es-ES" b="0" i="0" dirty="0">
-                <a:effectLst/>
-                <a:latin typeface="anthropic-sans"/>
-              </a:rPr>
-              <a:t>/min</a:t>
+              <a:rPr lang="es-CO" altLang="es-CO" kern="100" dirty="0">
+                <a:latin typeface="Aptos" panose="020B0004020202020204" pitchFamily="34" charset="0"/>
+                <a:cs typeface="Times New Roman" panose="02020603050405020304" pitchFamily="18" charset="0"/>
+              </a:rPr>
+              <a:t>/min). También cero muestras por encima de 350ms.</a:t>
+            </a:r>
+          </a:p>
+          <a:p>
+            <a:pPr marL="0" marR="0" lvl="0" indent="0" algn="l" defTabSz="914400" rtl="0" eaLnBrk="0" fontAlgn="base" latinLnBrk="0" hangingPunct="0">
+              <a:lnSpc>
+                <a:spcPct val="100000"/>
+              </a:lnSpc>
+              <a:spcBef>
+                <a:spcPct val="0"/>
+              </a:spcBef>
+              <a:spcAft>
+                <a:spcPct val="0"/>
+              </a:spcAft>
+              <a:buClrTx/>
+              <a:buSzTx/>
+              <a:buFontTx/>
+              <a:buNone/>
+              <a:tabLst/>
+            </a:pPr>
+            <a:endParaRPr lang="es-CO" altLang="es-CO" kern="100" dirty="0">
+              <a:latin typeface="Aptos" panose="020B0004020202020204" pitchFamily="34" charset="0"/>
+              <a:cs typeface="Times New Roman" panose="02020603050405020304" pitchFamily="18" charset="0"/>
+            </a:endParaRPr>
+          </a:p>
+          <a:p>
+            <a:pPr marL="0" marR="0" lvl="0" indent="0" algn="l" defTabSz="914400" rtl="0" eaLnBrk="0" fontAlgn="base" latinLnBrk="0" hangingPunct="0">
+              <a:lnSpc>
+                <a:spcPct val="100000"/>
+              </a:lnSpc>
+              <a:spcBef>
+                <a:spcPct val="0"/>
+              </a:spcBef>
+              <a:spcAft>
+                <a:spcPct val="0"/>
+              </a:spcAft>
+              <a:buClrTx/>
+              <a:buSzTx/>
+              <a:buFontTx/>
+              <a:buNone/>
+              <a:tabLst/>
+            </a:pPr>
+            <a:r>
+              <a:rPr lang="es-CO" altLang="es-CO" kern="100" dirty="0">
+                <a:latin typeface="Aptos" panose="020B0004020202020204" pitchFamily="34" charset="0"/>
+                <a:cs typeface="Times New Roman" panose="02020603050405020304" pitchFamily="18" charset="0"/>
+              </a:rPr>
+              <a:t>El volumen de confirmaciones en Fase 2 fue 4.3 veces mayor que en Fase 1 (169.232 vs 39.272), y sin embargo el p95 no empeoró — mejoró levemente (6.60ms vs 6.71ms). </a:t>
+            </a:r>
+          </a:p>
+          <a:p>
+            <a:pPr marL="0" marR="0" lvl="0" indent="0" algn="l" defTabSz="914400" rtl="0" eaLnBrk="0" fontAlgn="base" latinLnBrk="0" hangingPunct="0">
+              <a:lnSpc>
+                <a:spcPct val="100000"/>
+              </a:lnSpc>
+              <a:spcBef>
+                <a:spcPct val="0"/>
+              </a:spcBef>
+              <a:spcAft>
+                <a:spcPct val="0"/>
+              </a:spcAft>
+              <a:buClrTx/>
+              <a:buSzTx/>
+              <a:buFontTx/>
+              <a:buNone/>
+              <a:tabLst/>
+            </a:pPr>
+            <a:endParaRPr lang="es-CO" altLang="es-CO" kern="100" dirty="0">
+              <a:latin typeface="Aptos" panose="020B0004020202020204" pitchFamily="34" charset="0"/>
+              <a:cs typeface="Times New Roman" panose="02020603050405020304" pitchFamily="18" charset="0"/>
+            </a:endParaRPr>
+          </a:p>
+          <a:p>
+            <a:pPr marL="0" marR="0" lvl="0" indent="0" algn="l" defTabSz="914400" rtl="0" eaLnBrk="0" fontAlgn="base" latinLnBrk="0" hangingPunct="0">
+              <a:lnSpc>
+                <a:spcPct val="100000"/>
+              </a:lnSpc>
+              <a:spcBef>
+                <a:spcPct val="0"/>
+              </a:spcBef>
+              <a:spcAft>
+                <a:spcPct val="0"/>
+              </a:spcAft>
+              <a:buClrTx/>
+              <a:buSzTx/>
+              <a:buFontTx/>
+              <a:buNone/>
+              <a:tabLst/>
+            </a:pPr>
+            <a:r>
+              <a:rPr lang="es-CO" altLang="es-CO" kern="100" dirty="0">
+                <a:latin typeface="Aptos" panose="020B0004020202020204" pitchFamily="34" charset="0"/>
+                <a:cs typeface="Times New Roman" panose="02020603050405020304" pitchFamily="18" charset="0"/>
+              </a:rPr>
+              <a:t>El aislamiento del canal transaccional evita contención con el tráfico de difusión general. Si el canal de confirmaciones compartiera recursos con el resto del sistema, más volumen debería traducirse en más latencia.</a:t>
             </a:r>
           </a:p>
         </p:txBody>
@@ -9013,8 +8942,8 @@
         </p:nvSpPr>
         <p:spPr bwMode="auto">
           <a:xfrm>
-            <a:off x="6183630" y="2091690"/>
-            <a:ext cx="12192000" cy="457200"/>
+            <a:off x="6655664" y="292028"/>
+            <a:ext cx="5536336" cy="2308324"/>
           </a:xfrm>
           <a:prstGeom prst="rect">
             <a:avLst/>
@@ -9054,7 +8983,7 @@
           </a:extLst>
         </p:spPr>
         <p:txBody>
-          <a:bodyPr vert="horz" wrap="none" lIns="91440" tIns="45720" rIns="91440" bIns="45720" numCol="1" anchor="ctr" anchorCtr="0" compatLnSpc="1">
+          <a:bodyPr vert="horz" wrap="square" lIns="91440" tIns="45720" rIns="91440" bIns="45720" numCol="1" anchor="ctr" anchorCtr="0" compatLnSpc="1">
             <a:prstTxWarp prst="textNoShape">
               <a:avLst/>
             </a:prstTxWarp>
@@ -9079,17 +9008,32 @@
               <a:tabLst/>
             </a:pPr>
             <a:r>
-              <a:rPr kumimoji="0" lang="es-CO" altLang="es-CO" sz="900" b="1" i="0" u="none" strike="noStrike" cap="none" normalizeH="0" baseline="0">
-                <a:ln>
-                  <a:noFill/>
-                </a:ln>
-                <a:solidFill>
-                  <a:schemeClr val="tx1"/>
-                </a:solidFill>
-                <a:effectLst/>
-                <a:latin typeface="Arial" panose="020B0604020202020204" pitchFamily="34" charset="0"/>
-              </a:rPr>
-              <a:t>Fase 1 — Por qué cumple</a:t>
+              <a:rPr lang="es-ES" b="1" i="0" dirty="0">
+                <a:effectLst/>
+                <a:latin typeface="anthropic-sans"/>
+              </a:rPr>
+              <a:t>FASE 1: CUMPLE  </a:t>
+            </a:r>
+            <a:r>
+              <a:rPr lang="es-CO" altLang="es-CO" kern="100" dirty="0">
+                <a:latin typeface="Aptos" panose="020B0004020202020204" pitchFamily="34" charset="0"/>
+                <a:cs typeface="Times New Roman" panose="02020603050405020304" pitchFamily="18" charset="0"/>
+              </a:rPr>
+              <a:t>p95 = 6.71ms sobre 39.272 muestras (≈65.5 confirmaciones/s ≈ 1.964 </a:t>
+            </a:r>
+            <a:r>
+              <a:rPr lang="es-CO" altLang="es-CO" kern="100" dirty="0" err="1">
+                <a:latin typeface="Aptos" panose="020B0004020202020204" pitchFamily="34" charset="0"/>
+                <a:cs typeface="Times New Roman" panose="02020603050405020304" pitchFamily="18" charset="0"/>
+              </a:rPr>
+              <a:t>matches</a:t>
+            </a:r>
+            <a:r>
+              <a:rPr lang="es-CO" altLang="es-CO" kern="100" dirty="0">
+                <a:latin typeface="Aptos" panose="020B0004020202020204" pitchFamily="34" charset="0"/>
+                <a:cs typeface="Times New Roman" panose="02020603050405020304" pitchFamily="18" charset="0"/>
+              </a:rPr>
+              <a:t>/min). Cero muestras por encima de 350ms.</a:t>
             </a:r>
           </a:p>
           <a:p>
@@ -9110,552 +9054,54 @@
               <a:tabLst/>
             </a:pPr>
             <a:r>
-              <a:rPr kumimoji="0" lang="es-CO" altLang="es-CO" sz="800" b="1" i="0" u="none" strike="noStrike" cap="none" normalizeH="0" baseline="0">
-                <a:ln>
-                  <a:noFill/>
-                </a:ln>
-                <a:solidFill>
-                  <a:schemeClr val="tx1"/>
-                </a:solidFill>
-                <a:effectLst/>
-                <a:latin typeface="Arial" panose="020B0604020202020204" pitchFamily="34" charset="0"/>
-              </a:rPr>
-              <a:t>Objetivo:</a:t>
-            </a:r>
-            <a:r>
-              <a:rPr kumimoji="0" lang="es-CO" altLang="es-CO" sz="1800" b="0" i="0" u="none" strike="noStrike" cap="none" normalizeH="0" baseline="0">
-                <a:ln>
-                  <a:noFill/>
-                </a:ln>
-                <a:solidFill>
-                  <a:schemeClr val="tx1"/>
-                </a:solidFill>
-                <a:effectLst/>
-                <a:latin typeface="Arial" panose="020B0604020202020204" pitchFamily="34" charset="0"/>
-              </a:rPr>
-              <a:t> ≤350ms (p95), sin pérdida ni duplicación de confirmaciones.</a:t>
-            </a:r>
-          </a:p>
-          <a:p>
-            <a:pPr marL="0" marR="0" lvl="0" indent="0" algn="l" defTabSz="914400" rtl="0" eaLnBrk="0" fontAlgn="base" latinLnBrk="0" hangingPunct="0">
-              <a:lnSpc>
-                <a:spcPct val="100000"/>
-              </a:lnSpc>
-              <a:spcBef>
-                <a:spcPct val="0"/>
-              </a:spcBef>
-              <a:spcAft>
-                <a:spcPct val="0"/>
-              </a:spcAft>
-              <a:buClrTx/>
-              <a:buSzTx/>
-              <a:buFontTx/>
-              <a:buNone/>
-              <a:tabLst/>
-            </a:pPr>
-            <a:r>
-              <a:rPr kumimoji="0" lang="es-CO" altLang="es-CO" sz="1800" b="1" i="0" u="none" strike="noStrike" cap="none" normalizeH="0" baseline="0">
-                <a:ln>
-                  <a:noFill/>
-                </a:ln>
-                <a:solidFill>
-                  <a:schemeClr val="tx1"/>
-                </a:solidFill>
-                <a:effectLst/>
-                <a:latin typeface="Arial" panose="020B0604020202020204" pitchFamily="34" charset="0"/>
-              </a:rPr>
-              <a:t>Resultado real del CSV:</a:t>
-            </a:r>
-            <a:r>
-              <a:rPr kumimoji="0" lang="es-CO" altLang="es-CO" sz="1800" b="0" i="0" u="none" strike="noStrike" cap="none" normalizeH="0" baseline="0">
-                <a:ln>
-                  <a:noFill/>
-                </a:ln>
-                <a:solidFill>
-                  <a:schemeClr val="tx1"/>
-                </a:solidFill>
-                <a:effectLst/>
-                <a:latin typeface="Arial" panose="020B0604020202020204" pitchFamily="34" charset="0"/>
-              </a:rPr>
-              <a:t> p95 = 6.71ms sobre 39.272 muestras (≈65.5 confirmaciones/s ≈ 1.964 matches/min). </a:t>
-            </a:r>
-            <a:r>
-              <a:rPr kumimoji="0" lang="es-CO" altLang="es-CO" sz="1800" b="1" i="0" u="none" strike="noStrike" cap="none" normalizeH="0" baseline="0">
-                <a:ln>
-                  <a:noFill/>
-                </a:ln>
-                <a:solidFill>
-                  <a:schemeClr val="tx1"/>
-                </a:solidFill>
-                <a:effectLst/>
-                <a:latin typeface="Arial" panose="020B0604020202020204" pitchFamily="34" charset="0"/>
-              </a:rPr>
-              <a:t>Cero</a:t>
-            </a:r>
-            <a:r>
-              <a:rPr kumimoji="0" lang="es-CO" altLang="es-CO" sz="1800" b="0" i="0" u="none" strike="noStrike" cap="none" normalizeH="0" baseline="0">
-                <a:ln>
-                  <a:noFill/>
-                </a:ln>
-                <a:solidFill>
-                  <a:schemeClr val="tx1"/>
-                </a:solidFill>
-                <a:effectLst/>
-                <a:latin typeface="Arial" panose="020B0604020202020204" pitchFamily="34" charset="0"/>
-              </a:rPr>
-              <a:t> muestras por encima de 350ms.</a:t>
-            </a:r>
-          </a:p>
-          <a:p>
-            <a:pPr marL="0" marR="0" lvl="0" indent="0" algn="l" defTabSz="914400" rtl="0" eaLnBrk="0" fontAlgn="base" latinLnBrk="0" hangingPunct="0">
-              <a:lnSpc>
-                <a:spcPct val="100000"/>
-              </a:lnSpc>
-              <a:spcBef>
-                <a:spcPct val="0"/>
-              </a:spcBef>
-              <a:spcAft>
-                <a:spcPct val="0"/>
-              </a:spcAft>
-              <a:buClrTx/>
-              <a:buSzTx/>
-              <a:buFontTx/>
-              <a:buNone/>
-              <a:tabLst/>
-            </a:pPr>
-            <a:r>
-              <a:rPr kumimoji="0" lang="es-CO" altLang="es-CO" sz="1800" b="1" i="0" u="none" strike="noStrike" cap="none" normalizeH="0" baseline="0">
-                <a:ln>
-                  <a:noFill/>
-                </a:ln>
-                <a:solidFill>
-                  <a:schemeClr val="tx1"/>
-                </a:solidFill>
-                <a:effectLst/>
-                <a:latin typeface="Arial" panose="020B0604020202020204" pitchFamily="34" charset="0"/>
-              </a:rPr>
-              <a:t>Por qué cumple:</a:t>
-            </a:r>
-            <a:r>
-              <a:rPr kumimoji="0" lang="es-CO" altLang="es-CO" sz="1800" b="0" i="0" u="none" strike="noStrike" cap="none" normalizeH="0" baseline="0">
-                <a:ln>
-                  <a:noFill/>
-                </a:ln>
-                <a:solidFill>
-                  <a:schemeClr val="tx1"/>
-                </a:solidFill>
-                <a:effectLst/>
-                <a:latin typeface="Arial" panose="020B0604020202020204" pitchFamily="34" charset="0"/>
-              </a:rPr>
-              <a:t> 6.71ms está </a:t>
-            </a:r>
-            <a:r>
-              <a:rPr kumimoji="0" lang="es-CO" altLang="es-CO" sz="1800" b="1" i="0" u="none" strike="noStrike" cap="none" normalizeH="0" baseline="0">
-                <a:ln>
-                  <a:noFill/>
-                </a:ln>
-                <a:solidFill>
-                  <a:schemeClr val="tx1"/>
-                </a:solidFill>
-                <a:effectLst/>
-                <a:latin typeface="Arial" panose="020B0604020202020204" pitchFamily="34" charset="0"/>
-              </a:rPr>
-              <a:t>52 veces</a:t>
-            </a:r>
-            <a:r>
-              <a:rPr kumimoji="0" lang="es-CO" altLang="es-CO" sz="1800" b="0" i="0" u="none" strike="noStrike" cap="none" normalizeH="0" baseline="0">
-                <a:ln>
-                  <a:noFill/>
-                </a:ln>
-                <a:solidFill>
-                  <a:schemeClr val="tx1"/>
-                </a:solidFill>
-                <a:effectLst/>
-                <a:latin typeface="Arial" panose="020B0604020202020204" pitchFamily="34" charset="0"/>
-              </a:rPr>
-              <a:t> por debajo del límite de 350ms. Con este volumen (línea base), cada uno de los tres tramos del canal transaccional —match en memoria, publicación al exchange dedicado </a:t>
-            </a:r>
-            <a:r>
-              <a:rPr kumimoji="0" lang="es-CO" altLang="es-CO" sz="1000" b="0" i="0" u="none" strike="noStrike" cap="none" normalizeH="0" baseline="0">
-                <a:ln>
-                  <a:noFill/>
-                </a:ln>
-                <a:solidFill>
-                  <a:schemeClr val="tx1"/>
-                </a:solidFill>
-                <a:effectLst/>
-                <a:latin typeface="Arial Unicode MS"/>
+              <a:rPr lang="es-CO" altLang="es-CO" kern="100" dirty="0">
+                <a:latin typeface="Aptos" panose="020B0004020202020204" pitchFamily="34" charset="0"/>
+                <a:cs typeface="Times New Roman" panose="02020603050405020304" pitchFamily="18" charset="0"/>
+              </a:rPr>
+              <a:t>Con este volumen, cada uno de los tres tramos del canal transaccional, publicación al </a:t>
+            </a:r>
+            <a:r>
+              <a:rPr lang="es-CO" altLang="es-CO" kern="100" dirty="0" err="1">
+                <a:latin typeface="Aptos" panose="020B0004020202020204" pitchFamily="34" charset="0"/>
+                <a:cs typeface="Times New Roman" panose="02020603050405020304" pitchFamily="18" charset="0"/>
+              </a:rPr>
+              <a:t>exchange</a:t>
+            </a:r>
+            <a:r>
+              <a:rPr lang="es-CO" altLang="es-CO" kern="100" dirty="0">
+                <a:latin typeface="Aptos" panose="020B0004020202020204" pitchFamily="34" charset="0"/>
+                <a:cs typeface="Times New Roman" panose="02020603050405020304" pitchFamily="18" charset="0"/>
+              </a:rPr>
+              <a:t> dedicado </a:t>
+            </a:r>
+            <a:r>
+              <a:rPr lang="es-CO" altLang="es-CO" kern="100" dirty="0" err="1">
+                <a:latin typeface="Aptos" panose="020B0004020202020204" pitchFamily="34" charset="0"/>
+                <a:cs typeface="Times New Roman" panose="02020603050405020304" pitchFamily="18" charset="0"/>
               </a:rPr>
               <a:t>trade_events</a:t>
             </a:r>
             <a:r>
-              <a:rPr kumimoji="0" lang="es-CO" altLang="es-CO" sz="800" b="0" i="0" u="none" strike="noStrike" cap="none" normalizeH="0" baseline="0">
-                <a:ln>
-                  <a:noFill/>
-                </a:ln>
-                <a:solidFill>
-                  <a:schemeClr val="tx1"/>
-                </a:solidFill>
-                <a:effectLst/>
-              </a:rPr>
-              <a:t>, verificación de idempotencia en Redis y entrega por WebSocket ya conectado— tiene margen de sobra para completarse en milisegundos porque no compite por recursos con nada más. El p50 de 3.34ms te dice que la mitad de las confirmaciones llegaron en poco más de 3 milisegundos; el p95 de 6.71ms solo refleja la cola alta, no lo típico.</a:t>
-            </a:r>
-            <a:endParaRPr kumimoji="0" lang="es-CO" altLang="es-CO" sz="900" b="1" i="0" u="none" strike="noStrike" cap="none" normalizeH="0" baseline="0">
-              <a:ln>
-                <a:noFill/>
-              </a:ln>
-              <a:solidFill>
-                <a:schemeClr val="tx1"/>
-              </a:solidFill>
-              <a:effectLst/>
-              <a:latin typeface="Arial" panose="020B0604020202020204" pitchFamily="34" charset="0"/>
-            </a:endParaRPr>
-          </a:p>
-          <a:p>
-            <a:pPr marL="0" marR="0" lvl="0" indent="0" algn="l" defTabSz="914400" rtl="0" eaLnBrk="0" fontAlgn="base" latinLnBrk="0" hangingPunct="0">
-              <a:lnSpc>
-                <a:spcPct val="100000"/>
-              </a:lnSpc>
-              <a:spcBef>
-                <a:spcPct val="0"/>
-              </a:spcBef>
-              <a:spcAft>
-                <a:spcPct val="0"/>
-              </a:spcAft>
-              <a:buClrTx/>
-              <a:buSzTx/>
-              <a:buFontTx/>
-              <a:buNone/>
-              <a:tabLst/>
-            </a:pPr>
-            <a:r>
-              <a:rPr kumimoji="0" lang="es-CO" altLang="es-CO" sz="900" b="1" i="0" u="none" strike="noStrike" cap="none" normalizeH="0" baseline="0">
-                <a:ln>
-                  <a:noFill/>
-                </a:ln>
-                <a:solidFill>
-                  <a:schemeClr val="tx1"/>
-                </a:solidFill>
-                <a:effectLst/>
-                <a:latin typeface="Arial" panose="020B0604020202020204" pitchFamily="34" charset="0"/>
-              </a:rPr>
-              <a:t>Fase 2 — Por qué cumple (y por qué es el dato más contundente)</a:t>
-            </a:r>
-          </a:p>
-          <a:p>
-            <a:pPr marL="0" marR="0" lvl="0" indent="0" algn="l" defTabSz="914400" rtl="0" eaLnBrk="0" fontAlgn="base" latinLnBrk="0" hangingPunct="0">
-              <a:lnSpc>
-                <a:spcPct val="100000"/>
-              </a:lnSpc>
-              <a:spcBef>
-                <a:spcPct val="0"/>
-              </a:spcBef>
-              <a:spcAft>
-                <a:spcPct val="0"/>
-              </a:spcAft>
-              <a:buClrTx/>
-              <a:buSzTx/>
-              <a:buFontTx/>
-              <a:buNone/>
-              <a:tabLst/>
-            </a:pPr>
-            <a:r>
-              <a:rPr kumimoji="0" lang="es-CO" altLang="es-CO" sz="800" b="1" i="0" u="none" strike="noStrike" cap="none" normalizeH="0" baseline="0">
-                <a:ln>
-                  <a:noFill/>
-                </a:ln>
-                <a:solidFill>
-                  <a:schemeClr val="tx1"/>
-                </a:solidFill>
-                <a:effectLst/>
-                <a:latin typeface="Arial" panose="020B0604020202020204" pitchFamily="34" charset="0"/>
-              </a:rPr>
-              <a:t>Objetivo:</a:t>
-            </a:r>
-            <a:r>
-              <a:rPr kumimoji="0" lang="es-CO" altLang="es-CO" sz="1800" b="0" i="0" u="none" strike="noStrike" cap="none" normalizeH="0" baseline="0">
-                <a:ln>
-                  <a:noFill/>
-                </a:ln>
-                <a:solidFill>
-                  <a:schemeClr val="tx1"/>
-                </a:solidFill>
-                <a:effectLst/>
-                <a:latin typeface="Arial" panose="020B0604020202020204" pitchFamily="34" charset="0"/>
-              </a:rPr>
-              <a:t> lo mismo, ≤350ms p95, pero sostenido durante 30 minutos bajo el pico.</a:t>
-            </a:r>
-          </a:p>
-          <a:p>
-            <a:pPr marL="0" marR="0" lvl="0" indent="0" algn="l" defTabSz="914400" rtl="0" eaLnBrk="0" fontAlgn="base" latinLnBrk="0" hangingPunct="0">
-              <a:lnSpc>
-                <a:spcPct val="100000"/>
-              </a:lnSpc>
-              <a:spcBef>
-                <a:spcPct val="0"/>
-              </a:spcBef>
-              <a:spcAft>
-                <a:spcPct val="0"/>
-              </a:spcAft>
-              <a:buClrTx/>
-              <a:buSzTx/>
-              <a:buFontTx/>
-              <a:buNone/>
-              <a:tabLst/>
-            </a:pPr>
-            <a:r>
-              <a:rPr kumimoji="0" lang="es-CO" altLang="es-CO" sz="1800" b="1" i="0" u="none" strike="noStrike" cap="none" normalizeH="0" baseline="0">
-                <a:ln>
-                  <a:noFill/>
-                </a:ln>
-                <a:solidFill>
-                  <a:schemeClr val="tx1"/>
-                </a:solidFill>
-                <a:effectLst/>
-                <a:latin typeface="Arial" panose="020B0604020202020204" pitchFamily="34" charset="0"/>
-              </a:rPr>
-              <a:t>Resultado real del CSV:</a:t>
-            </a:r>
-            <a:r>
-              <a:rPr kumimoji="0" lang="es-CO" altLang="es-CO" sz="1800" b="0" i="0" u="none" strike="noStrike" cap="none" normalizeH="0" baseline="0">
-                <a:ln>
-                  <a:noFill/>
-                </a:ln>
-                <a:solidFill>
-                  <a:schemeClr val="tx1"/>
-                </a:solidFill>
-                <a:effectLst/>
-                <a:latin typeface="Arial" panose="020B0604020202020204" pitchFamily="34" charset="0"/>
-              </a:rPr>
-              <a:t> p95 = 6.60ms sobre 169.232 muestras (≈94 confirmaciones/s ≈ 2.821 matches/min). También </a:t>
-            </a:r>
-            <a:r>
-              <a:rPr kumimoji="0" lang="es-CO" altLang="es-CO" sz="1800" b="1" i="0" u="none" strike="noStrike" cap="none" normalizeH="0" baseline="0">
-                <a:ln>
-                  <a:noFill/>
-                </a:ln>
-                <a:solidFill>
-                  <a:schemeClr val="tx1"/>
-                </a:solidFill>
-                <a:effectLst/>
-                <a:latin typeface="Arial" panose="020B0604020202020204" pitchFamily="34" charset="0"/>
-              </a:rPr>
-              <a:t>cero</a:t>
-            </a:r>
-            <a:r>
-              <a:rPr kumimoji="0" lang="es-CO" altLang="es-CO" sz="1800" b="0" i="0" u="none" strike="noStrike" cap="none" normalizeH="0" baseline="0">
-                <a:ln>
-                  <a:noFill/>
-                </a:ln>
-                <a:solidFill>
-                  <a:schemeClr val="tx1"/>
-                </a:solidFill>
-                <a:effectLst/>
-                <a:latin typeface="Arial" panose="020B0604020202020204" pitchFamily="34" charset="0"/>
-              </a:rPr>
-              <a:t> muestras por encima de 350ms.</a:t>
-            </a:r>
-          </a:p>
-          <a:p>
-            <a:pPr marL="0" marR="0" lvl="0" indent="0" algn="l" defTabSz="914400" rtl="0" eaLnBrk="0" fontAlgn="base" latinLnBrk="0" hangingPunct="0">
-              <a:lnSpc>
-                <a:spcPct val="100000"/>
-              </a:lnSpc>
-              <a:spcBef>
-                <a:spcPct val="0"/>
-              </a:spcBef>
-              <a:spcAft>
-                <a:spcPct val="0"/>
-              </a:spcAft>
-              <a:buClrTx/>
-              <a:buSzTx/>
-              <a:buFontTx/>
-              <a:buNone/>
-              <a:tabLst/>
-            </a:pPr>
-            <a:r>
-              <a:rPr kumimoji="0" lang="es-CO" altLang="es-CO" sz="1800" b="1" i="0" u="none" strike="noStrike" cap="none" normalizeH="0" baseline="0">
-                <a:ln>
-                  <a:noFill/>
-                </a:ln>
-                <a:solidFill>
-                  <a:schemeClr val="tx1"/>
-                </a:solidFill>
-                <a:effectLst/>
-                <a:latin typeface="Arial" panose="020B0604020202020204" pitchFamily="34" charset="0"/>
-              </a:rPr>
-              <a:t>Por qué cumple:</a:t>
-            </a:r>
-            <a:r>
-              <a:rPr kumimoji="0" lang="es-CO" altLang="es-CO" sz="1800" b="0" i="0" u="none" strike="noStrike" cap="none" normalizeH="0" baseline="0">
-                <a:ln>
-                  <a:noFill/>
-                </a:ln>
-                <a:solidFill>
-                  <a:schemeClr val="tx1"/>
-                </a:solidFill>
-                <a:effectLst/>
-                <a:latin typeface="Arial" panose="020B0604020202020204" pitchFamily="34" charset="0"/>
-              </a:rPr>
-              <a:t> aquí está el punto central de la hipótesis. El volumen de confirmaciones en Fase 2 fue </a:t>
-            </a:r>
-            <a:r>
-              <a:rPr kumimoji="0" lang="es-CO" altLang="es-CO" sz="1800" b="1" i="0" u="none" strike="noStrike" cap="none" normalizeH="0" baseline="0">
-                <a:ln>
-                  <a:noFill/>
-                </a:ln>
-                <a:solidFill>
-                  <a:schemeClr val="tx1"/>
-                </a:solidFill>
-                <a:effectLst/>
-                <a:latin typeface="Arial" panose="020B0604020202020204" pitchFamily="34" charset="0"/>
-              </a:rPr>
-              <a:t>4.3 veces mayor</a:t>
-            </a:r>
-            <a:r>
-              <a:rPr kumimoji="0" lang="es-CO" altLang="es-CO" sz="1800" b="0" i="0" u="none" strike="noStrike" cap="none" normalizeH="0" baseline="0">
-                <a:ln>
-                  <a:noFill/>
-                </a:ln>
-                <a:solidFill>
-                  <a:schemeClr val="tx1"/>
-                </a:solidFill>
-                <a:effectLst/>
-                <a:latin typeface="Arial" panose="020B0604020202020204" pitchFamily="34" charset="0"/>
-              </a:rPr>
-              <a:t> que en Fase 1 (169.232 vs 39.272), y sin embargo el p95 </a:t>
-            </a:r>
-            <a:r>
-              <a:rPr kumimoji="0" lang="es-CO" altLang="es-CO" sz="1800" b="1" i="0" u="none" strike="noStrike" cap="none" normalizeH="0" baseline="0">
-                <a:ln>
-                  <a:noFill/>
-                </a:ln>
-                <a:solidFill>
-                  <a:schemeClr val="tx1"/>
-                </a:solidFill>
-                <a:effectLst/>
-                <a:latin typeface="Arial" panose="020B0604020202020204" pitchFamily="34" charset="0"/>
-              </a:rPr>
-              <a:t>no empeoró — mejoró levemente</a:t>
-            </a:r>
-            <a:r>
-              <a:rPr kumimoji="0" lang="es-CO" altLang="es-CO" sz="1800" b="0" i="0" u="none" strike="noStrike" cap="none" normalizeH="0" baseline="0">
-                <a:ln>
-                  <a:noFill/>
-                </a:ln>
-                <a:solidFill>
-                  <a:schemeClr val="tx1"/>
-                </a:solidFill>
-                <a:effectLst/>
-                <a:latin typeface="Arial" panose="020B0604020202020204" pitchFamily="34" charset="0"/>
-              </a:rPr>
-              <a:t> (6.60ms vs 6.71ms). Eso es exactamente lo que predice la causa que plantea la hipótesis: </a:t>
-            </a:r>
-            <a:r>
-              <a:rPr kumimoji="0" lang="es-CO" altLang="es-CO" sz="1800" b="0" i="1" u="none" strike="noStrike" cap="none" normalizeH="0" baseline="0">
-                <a:ln>
-                  <a:noFill/>
-                </a:ln>
-                <a:solidFill>
-                  <a:schemeClr val="tx1"/>
-                </a:solidFill>
-                <a:effectLst/>
-                <a:latin typeface="Arial" panose="020B0604020202020204" pitchFamily="34" charset="0"/>
-              </a:rPr>
-              <a:t>"el aislamiento del canal transaccional evita contención con el tráfico de difusión general"</a:t>
-            </a:r>
-            <a:r>
-              <a:rPr kumimoji="0" lang="es-CO" altLang="es-CO" sz="1800" b="0" i="0" u="none" strike="noStrike" cap="none" normalizeH="0" baseline="0">
-                <a:ln>
-                  <a:noFill/>
-                </a:ln>
-                <a:solidFill>
-                  <a:schemeClr val="tx1"/>
-                </a:solidFill>
-                <a:effectLst/>
-                <a:latin typeface="Arial" panose="020B0604020202020204" pitchFamily="34" charset="0"/>
-              </a:rPr>
-              <a:t>. Si el canal de confirmaciones compartiera recursos con el resto del sistema, más volumen debería traducirse en más latencia — aquí no pasó, lo cual es evidencia de que el aislamiento realmente está haciendo su trabajo, no solo en teoría sino con datos.</a:t>
-            </a:r>
-          </a:p>
-          <a:p>
-            <a:pPr marL="0" marR="0" lvl="0" indent="0" algn="l" defTabSz="914400" rtl="0" eaLnBrk="0" fontAlgn="base" latinLnBrk="0" hangingPunct="0">
-              <a:lnSpc>
-                <a:spcPct val="100000"/>
-              </a:lnSpc>
-              <a:spcBef>
-                <a:spcPct val="0"/>
-              </a:spcBef>
-              <a:spcAft>
-                <a:spcPct val="0"/>
-              </a:spcAft>
-              <a:buClrTx/>
-              <a:buSzTx/>
-              <a:buFontTx/>
-              <a:buNone/>
-              <a:tabLst/>
-            </a:pPr>
-            <a:r>
-              <a:rPr kumimoji="0" lang="es-CO" altLang="es-CO" sz="1800" b="1" i="0" u="none" strike="noStrike" cap="none" normalizeH="0" baseline="0">
-                <a:ln>
-                  <a:noFill/>
-                </a:ln>
-                <a:solidFill>
-                  <a:schemeClr val="tx1"/>
-                </a:solidFill>
-                <a:effectLst/>
-                <a:latin typeface="Arial" panose="020B0604020202020204" pitchFamily="34" charset="0"/>
-              </a:rPr>
-              <a:t>Un detalle que vale la pena mencionar en tu informe:</a:t>
-            </a:r>
-            <a:r>
-              <a:rPr kumimoji="0" lang="es-CO" altLang="es-CO" sz="1800" b="0" i="0" u="none" strike="noStrike" cap="none" normalizeH="0" baseline="0">
-                <a:ln>
-                  <a:noFill/>
-                </a:ln>
-                <a:solidFill>
-                  <a:schemeClr val="tx1"/>
-                </a:solidFill>
-                <a:effectLst/>
-                <a:latin typeface="Arial" panose="020B0604020202020204" pitchFamily="34" charset="0"/>
-              </a:rPr>
-              <a:t> el </a:t>
-            </a:r>
-            <a:r>
-              <a:rPr kumimoji="0" lang="es-CO" altLang="es-CO" sz="1000" b="0" i="0" u="none" strike="noStrike" cap="none" normalizeH="0" baseline="0">
-                <a:ln>
-                  <a:noFill/>
-                </a:ln>
-                <a:solidFill>
-                  <a:schemeClr val="tx1"/>
-                </a:solidFill>
-                <a:effectLst/>
-                <a:latin typeface="Arial Unicode MS"/>
-              </a:rPr>
-              <a:t>max</a:t>
-            </a:r>
-            <a:r>
-              <a:rPr kumimoji="0" lang="es-CO" altLang="es-CO" sz="800" b="0" i="0" u="none" strike="noStrike" cap="none" normalizeH="0" baseline="0">
-                <a:ln>
-                  <a:noFill/>
-                </a:ln>
-                <a:solidFill>
-                  <a:schemeClr val="tx1"/>
-                </a:solidFill>
-                <a:effectLst/>
-              </a:rPr>
-              <a:t> de esta corrida (277ms en Fase 2, según lo que verificamos) sigue estando por debajo de los 350ms del objetivo — a diferencia de corridas anteriores donde el máximo absoluto sí superaba el límite puntualmente (sin afectar el p95). Esta corrida en particular no tuvo ni un solo caso individual fuera del umbral, lo cual la hace tu evidencia más limpia hasta ahora.</a:t>
-            </a:r>
-            <a:endParaRPr kumimoji="0" lang="es-CO" altLang="es-CO" sz="1800" b="0" i="0" u="none" strike="noStrike" cap="none" normalizeH="0" baseline="0">
-              <a:ln>
-                <a:noFill/>
-              </a:ln>
-              <a:solidFill>
-                <a:schemeClr val="tx1"/>
-              </a:solidFill>
-              <a:effectLst/>
-              <a:latin typeface="Arial" panose="020B0604020202020204" pitchFamily="34" charset="0"/>
-            </a:endParaRPr>
+              <a:rPr lang="es-CO" altLang="es-CO" kern="100" dirty="0">
+                <a:latin typeface="Aptos" panose="020B0004020202020204" pitchFamily="34" charset="0"/>
+                <a:cs typeface="Times New Roman" panose="02020603050405020304" pitchFamily="18" charset="0"/>
+              </a:rPr>
+              <a:t>, verificación de idempotencia en Redis y entrega por </a:t>
+            </a:r>
+            <a:r>
+              <a:rPr lang="es-CO" altLang="es-CO" kern="100" dirty="0" err="1">
+                <a:latin typeface="Aptos" panose="020B0004020202020204" pitchFamily="34" charset="0"/>
+                <a:cs typeface="Times New Roman" panose="02020603050405020304" pitchFamily="18" charset="0"/>
+              </a:rPr>
+              <a:t>WebSocket</a:t>
+            </a:r>
+            <a:r>
+              <a:rPr lang="es-CO" altLang="es-CO" kern="100" dirty="0">
+                <a:latin typeface="Aptos" panose="020B0004020202020204" pitchFamily="34" charset="0"/>
+                <a:cs typeface="Times New Roman" panose="02020603050405020304" pitchFamily="18" charset="0"/>
+              </a:rPr>
+              <a:t> no compite por recursos con nada más.</a:t>
+            </a:r>
           </a:p>
         </p:txBody>
       </p:sp>

--- a/results/resultados.pptx
+++ b/results/resultados.pptx
@@ -15,7 +15,6 @@
     <p:sldId id="267" r:id="rId9"/>
     <p:sldId id="270" r:id="rId10"/>
     <p:sldId id="271" r:id="rId11"/>
-    <p:sldId id="272" r:id="rId12"/>
   </p:sldIdLst>
   <p:sldSz cx="12192000" cy="6858000"/>
   <p:notesSz cx="6858000" cy="9144000"/>
@@ -137,7 +136,6 @@
             <p14:sldId id="267"/>
             <p14:sldId id="270"/>
             <p14:sldId id="271"/>
-            <p14:sldId id="272"/>
           </p14:sldIdLst>
         </p14:section>
       </p14:sectionLst>
@@ -3543,7 +3541,7 @@
                     <a:lstStyle/>
                     <a:p>
                       <a:r>
-                        <a:rPr lang="es-CO"/>
+                        <a:rPr lang="es-CO" dirty="0"/>
                         <a:t>Experimento 1</a:t>
                       </a:r>
                     </a:p>
@@ -4884,112 +4882,6 @@
 </p:sld>
 </file>
 
-<file path=ppt/slides/slide11.xml><?xml version="1.0" encoding="utf-8"?>
-<p:sld xmlns:a="http://schemas.openxmlformats.org/drawingml/2006/main" xmlns:r="http://schemas.openxmlformats.org/officeDocument/2006/relationships" xmlns:p="http://schemas.openxmlformats.org/presentationml/2006/main">
-  <p:cSld>
-    <p:spTree>
-      <p:nvGrpSpPr>
-        <p:cNvPr id="1" name=""/>
-        <p:cNvGrpSpPr/>
-        <p:nvPr/>
-      </p:nvGrpSpPr>
-      <p:grpSpPr>
-        <a:xfrm>
-          <a:off x="0" y="0"/>
-          <a:ext cx="0" cy="0"/>
-          <a:chOff x="0" y="0"/>
-          <a:chExt cx="0" cy="0"/>
-        </a:xfrm>
-      </p:grpSpPr>
-      <p:sp>
-        <p:nvSpPr>
-          <p:cNvPr id="5" name="CuadroTexto 4">
-            <a:extLst>
-              <a:ext uri="{FF2B5EF4-FFF2-40B4-BE49-F238E27FC236}">
-                <a16:creationId xmlns:a16="http://schemas.microsoft.com/office/drawing/2014/main" id="{5A2B6FE2-15BB-0C1F-3B4C-07D7A02AE8FF}"/>
-              </a:ext>
-            </a:extLst>
-          </p:cNvPr>
-          <p:cNvSpPr txBox="1"/>
-          <p:nvPr/>
-        </p:nvSpPr>
-        <p:spPr>
-          <a:xfrm>
-            <a:off x="3048953" y="1997839"/>
-            <a:ext cx="6097904" cy="2862322"/>
-          </a:xfrm>
-          <a:prstGeom prst="rect">
-            <a:avLst/>
-          </a:prstGeom>
-          <a:noFill/>
-        </p:spPr>
-        <p:txBody>
-          <a:bodyPr wrap="square">
-            <a:spAutoFit/>
-          </a:bodyPr>
-          <a:lstStyle/>
-          <a:p>
-            <a:r>
-              <a:rPr lang="es-ES" dirty="0"/>
-              <a:t>Lo más valioso de esto para tu informe: </a:t>
-            </a:r>
-            <a:r>
-              <a:rPr lang="es-ES" b="1" dirty="0"/>
-              <a:t>dos corridas independientes, en momentos distintos, dieron resultados casi idénticos</a:t>
-            </a:r>
-            <a:r>
-              <a:rPr lang="es-ES" dirty="0"/>
-              <a:t> (core_p95 ~0.02ms en ambas, </a:t>
-            </a:r>
-            <a:r>
-              <a:rPr lang="es-ES" dirty="0" err="1"/>
-              <a:t>matches</a:t>
-            </a:r>
-            <a:r>
-              <a:rPr lang="es-ES" dirty="0"/>
-              <a:t>/min ~4.6-4.7k en ambas). Eso no es casualidad — es evidencia de que el comportamiento es </a:t>
-            </a:r>
-            <a:r>
-              <a:rPr lang="es-ES" b="1" dirty="0"/>
-              <a:t>reproducible</a:t>
-            </a:r>
-            <a:r>
-              <a:rPr lang="es-ES" dirty="0"/>
-              <a:t>, no un resultado aislado que podría haber sido suerte. Con esto y el CSV de latencia que ya tienes, cubres las cuatro piezas de la hipótesis de escalabilidad (órdenes/min, </a:t>
-            </a:r>
-            <a:r>
-              <a:rPr lang="es-ES" dirty="0" err="1"/>
-              <a:t>matches</a:t>
-            </a:r>
-            <a:r>
-              <a:rPr lang="es-ES" dirty="0"/>
-              <a:t>/min, core_p95, y solo falta el % de error de </a:t>
-            </a:r>
-            <a:r>
-              <a:rPr lang="es-ES" dirty="0" err="1"/>
-              <a:t>Locust</a:t>
-            </a:r>
-            <a:r>
-              <a:rPr lang="es-ES" dirty="0"/>
-              <a:t> de esta corrida específica para cerrar el círculo del todo)</a:t>
-            </a:r>
-            <a:endParaRPr lang="es-CO" dirty="0"/>
-          </a:p>
-        </p:txBody>
-      </p:sp>
-    </p:spTree>
-    <p:extLst>
-      <p:ext uri="{BB962C8B-B14F-4D97-AF65-F5344CB8AC3E}">
-        <p14:creationId xmlns:p14="http://schemas.microsoft.com/office/powerpoint/2010/main" val="2247377054"/>
-      </p:ext>
-    </p:extLst>
-  </p:cSld>
-  <p:clrMapOvr>
-    <a:masterClrMapping/>
-  </p:clrMapOvr>
-</p:sld>
-</file>
-
 <file path=ppt/slides/slide2.xml><?xml version="1.0" encoding="utf-8"?>
 <p:sld xmlns:a="http://schemas.openxmlformats.org/drawingml/2006/main" xmlns:r="http://schemas.openxmlformats.org/officeDocument/2006/relationships" xmlns:p="http://schemas.openxmlformats.org/presentationml/2006/main">
   <p:cSld>
@@ -6133,7 +6025,7 @@
         </p:blipFill>
         <p:spPr>
           <a:xfrm>
-            <a:off x="5917474" y="3161847"/>
+            <a:off x="5775502" y="3161847"/>
             <a:ext cx="6416498" cy="3696153"/>
           </a:xfrm>
           <a:prstGeom prst="rect">
@@ -6402,7 +6294,7 @@
         </p:blipFill>
         <p:spPr>
           <a:xfrm>
-            <a:off x="2627561" y="1529662"/>
+            <a:off x="2651678" y="1523516"/>
             <a:ext cx="5500507" cy="3810964"/>
           </a:xfrm>
           <a:prstGeom prst="rect">
@@ -6509,7 +6401,7 @@
         </p:nvSpPr>
         <p:spPr>
           <a:xfrm>
-            <a:off x="5870379" y="1503223"/>
+            <a:off x="5870379" y="1598114"/>
             <a:ext cx="6093822" cy="2031325"/>
           </a:xfrm>
           <a:prstGeom prst="rect">
@@ -6782,7 +6674,7 @@
         </p:nvSpPr>
         <p:spPr>
           <a:xfrm>
-            <a:off x="227799" y="1166842"/>
+            <a:off x="227799" y="1414584"/>
             <a:ext cx="5081180" cy="5078313"/>
           </a:xfrm>
           <a:prstGeom prst="rect">
@@ -7036,7 +6928,7 @@
         </p:nvSpPr>
         <p:spPr>
           <a:xfrm>
-            <a:off x="5870379" y="3817518"/>
+            <a:off x="5870379" y="3982997"/>
             <a:ext cx="6321621" cy="2308324"/>
           </a:xfrm>
           <a:prstGeom prst="rect">
@@ -7330,7 +7222,7 @@
         <p:spPr>
           <a:xfrm>
             <a:off x="5825339" y="1537313"/>
-            <a:ext cx="6138862" cy="1477328"/>
+            <a:ext cx="6138862" cy="1200329"/>
           </a:xfrm>
           <a:prstGeom prst="rect">
             <a:avLst/>
@@ -7352,18 +7244,11 @@
               <a:t>FASE 1: CUMPLE </a:t>
             </a:r>
             <a:r>
-              <a:rPr lang="es-ES" b="0" i="0" dirty="0" err="1">
+              <a:rPr lang="es-ES" b="0" i="0" dirty="0">
                 <a:effectLst/>
                 <a:latin typeface="anthropic-sans"/>
               </a:rPr>
-              <a:t>Cumple</a:t>
-            </a:r>
-            <a:r>
-              <a:rPr lang="es-ES" b="0" i="0" dirty="0">
-                <a:effectLst/>
-                <a:latin typeface="anthropic-sans"/>
-              </a:rPr>
-              <a:t> con margen amplio, sin ningún </a:t>
+              <a:t>con margen amplio, sin ningún </a:t>
             </a:r>
             <a:r>
               <a:rPr lang="es-ES" b="0" i="0" dirty="0" err="1">
@@ -7544,7 +7429,7 @@
           <a:p>
             <a:r>
               <a:rPr lang="es-ES" dirty="0"/>
-              <a:t>la afirmación central del experimento no es "la latencia es baja" — es que </a:t>
+              <a:t>La afirmación central del experimento no es "la latencia es baja" — es que </a:t>
             </a:r>
             <a:r>
               <a:rPr lang="es-ES" b="1" dirty="0"/>
@@ -7611,6 +7496,12 @@
               <a:tabLst/>
             </a:pPr>
             <a:r>
+              <a:rPr lang="es-CO" altLang="es-CO" dirty="0">
+                <a:latin typeface="Arial" panose="020B0604020202020204" pitchFamily="34" charset="0"/>
+              </a:rPr>
+              <a:t>La hipótesis de escalabilidad dice que la cola asíncrona desacopla la velocidad de ingesta de la capacidad del motor, así que el motor no debería degradarse aunque llegue mucho más tráfico. Eso es exactamente lo que ves aquí: al subir el volumen de órdenes ~6 veces </a:t>
+            </a:r>
+            <a:r>
               <a:rPr kumimoji="0" lang="es-CO" altLang="es-CO" sz="1800" b="0" i="0" u="none" strike="noStrike" cap="none" normalizeH="0" baseline="0" dirty="0">
                 <a:ln>
                   <a:noFill/>
@@ -7621,58 +7512,13 @@
                 <a:effectLst/>
                 <a:latin typeface="Arial" panose="020B0604020202020204" pitchFamily="34" charset="0"/>
               </a:rPr>
-              <a:t>la hipótesis de escalabilidad dice que la cola asíncrona </a:t>
-            </a:r>
-            <a:r>
-              <a:rPr kumimoji="0" lang="es-CO" altLang="es-CO" sz="1800" b="0" i="1" u="none" strike="noStrike" cap="none" normalizeH="0" baseline="0" dirty="0">
-                <a:ln>
-                  <a:noFill/>
-                </a:ln>
-                <a:solidFill>
-                  <a:schemeClr val="tx1"/>
-                </a:solidFill>
-                <a:effectLst/>
+              <a:t>(de 1.421 a 8.291/</a:t>
+            </a:r>
+            <a:r>
+              <a:rPr lang="es-CO" altLang="es-CO" dirty="0">
                 <a:latin typeface="Arial" panose="020B0604020202020204" pitchFamily="34" charset="0"/>
               </a:rPr>
-              <a:t>desacopla</a:t>
-            </a:r>
-            <a:r>
-              <a:rPr kumimoji="0" lang="es-CO" altLang="es-CO" sz="1800" b="0" i="0" u="none" strike="noStrike" cap="none" normalizeH="0" baseline="0" dirty="0">
-                <a:ln>
-                  <a:noFill/>
-                </a:ln>
-                <a:solidFill>
-                  <a:schemeClr val="tx1"/>
-                </a:solidFill>
-                <a:effectLst/>
-                <a:latin typeface="Arial" panose="020B0604020202020204" pitchFamily="34" charset="0"/>
-              </a:rPr>
-              <a:t> la velocidad de ingesta de la capacidad del motor, así que el motor no debería degradarse aunque llegue mucho más tráfico. Eso es exactamente lo que ves aquí: al subir el volumen de órdenes ~6 veces (de 1.421 a 8.291/min), el </a:t>
-            </a:r>
-            <a:r>
-              <a:rPr kumimoji="0" lang="es-CO" altLang="es-CO" sz="1000" b="0" i="0" u="none" strike="noStrike" cap="none" normalizeH="0" baseline="0" dirty="0">
-                <a:ln>
-                  <a:noFill/>
-                </a:ln>
-                <a:solidFill>
-                  <a:schemeClr val="tx1"/>
-                </a:solidFill>
-                <a:effectLst/>
-                <a:latin typeface="Arial Unicode MS"/>
-              </a:rPr>
-              <a:t>core_p95</a:t>
-            </a:r>
-            <a:r>
-              <a:rPr kumimoji="0" lang="es-CO" altLang="es-CO" sz="800" b="0" i="0" u="none" strike="noStrike" cap="none" normalizeH="0" baseline="0" dirty="0">
-                <a:ln>
-                  <a:noFill/>
-                </a:ln>
-                <a:solidFill>
-                  <a:schemeClr val="tx1"/>
-                </a:solidFill>
-                <a:effectLst/>
-              </a:rPr>
-              <a:t> </a:t>
+              <a:t>min), el core_p95 </a:t>
             </a:r>
             <a:r>
               <a:rPr kumimoji="0" lang="es-CO" altLang="es-CO" sz="1800" b="1" i="0" u="none" strike="noStrike" cap="none" normalizeH="0" baseline="0" dirty="0">
@@ -8639,7 +8485,7 @@
         <p:spPr>
           <a:xfrm>
             <a:off x="227799" y="365103"/>
-            <a:ext cx="9397982" cy="646331"/>
+            <a:ext cx="6230874" cy="646331"/>
           </a:xfrm>
           <a:prstGeom prst="rect">
             <a:avLst/>
@@ -8886,8 +8732,8 @@
         </p:nvSpPr>
         <p:spPr>
           <a:xfrm>
-            <a:off x="13872059" y="3583283"/>
-            <a:ext cx="6138862" cy="1477328"/>
+            <a:off x="6655664" y="2691792"/>
+            <a:ext cx="5465216" cy="4247317"/>
           </a:xfrm>
           <a:prstGeom prst="rect">
             <a:avLst/>
@@ -8900,99 +8746,143 @@
           </a:bodyPr>
           <a:lstStyle/>
           <a:p>
-            <a:pPr algn="l"/>
+            <a:pPr marL="0" marR="0" lvl="0" indent="0" algn="l" defTabSz="914400" rtl="0" eaLnBrk="0" fontAlgn="base" latinLnBrk="0" hangingPunct="0">
+              <a:lnSpc>
+                <a:spcPct val="100000"/>
+              </a:lnSpc>
+              <a:spcBef>
+                <a:spcPct val="0"/>
+              </a:spcBef>
+              <a:spcAft>
+                <a:spcPct val="0"/>
+              </a:spcAft>
+              <a:buClrTx/>
+              <a:buSzTx/>
+              <a:buFontTx/>
+              <a:buNone/>
+              <a:tabLst/>
+            </a:pPr>
             <a:r>
               <a:rPr lang="es-ES" b="1" i="0" dirty="0">
                 <a:effectLst/>
                 <a:latin typeface="anthropic-sans"/>
               </a:rPr>
-              <a:t>FASE 1: CUMPLE </a:t>
-            </a:r>
-            <a:r>
-              <a:rPr lang="es-ES" b="0" i="0" dirty="0" err="1">
-                <a:effectLst/>
-                <a:latin typeface="anthropic-sans"/>
-              </a:rPr>
-              <a:t>Cumple</a:t>
-            </a:r>
-            <a:r>
-              <a:rPr lang="es-ES" b="0" i="0" dirty="0">
-                <a:effectLst/>
-                <a:latin typeface="anthropic-sans"/>
-              </a:rPr>
-              <a:t> con margen amplio, sin ningún </a:t>
-            </a:r>
-            <a:r>
-              <a:rPr lang="es-ES" b="0" i="0" dirty="0" err="1">
-                <a:effectLst/>
-                <a:latin typeface="anthropic-sans"/>
-              </a:rPr>
-              <a:t>outlier</a:t>
-            </a:r>
-            <a:r>
-              <a:rPr lang="es-ES" b="0" i="0" dirty="0">
-                <a:effectLst/>
-                <a:latin typeface="anthropic-sans"/>
-              </a:rPr>
-              <a:t> esta vez.</a:t>
-            </a:r>
-          </a:p>
-          <a:p>
-            <a:pPr algn="l"/>
-            <a:r>
-              <a:rPr lang="es-ES" b="0" i="0" dirty="0">
-                <a:effectLst/>
-                <a:latin typeface="anthropic-sans"/>
-              </a:rPr>
-              <a:t>p95 = 20.36ms (objetivo: &lt;=350ms) — 17x mejor que el límite</a:t>
-            </a:r>
-          </a:p>
-          <a:p>
-            <a:pPr algn="l"/>
-            <a:r>
-              <a:rPr lang="es-ES" b="0" i="0" dirty="0">
-                <a:effectLst/>
-                <a:latin typeface="anthropic-sans"/>
-              </a:rPr>
-              <a:t>0 de 29.898 muestras superó 350ms</a:t>
-            </a:r>
-          </a:p>
-          <a:p>
-            <a:pPr algn="l"/>
-            <a:r>
-              <a:rPr lang="es-ES" b="0" i="0" dirty="0">
-                <a:effectLst/>
-                <a:latin typeface="anthropic-sans"/>
-              </a:rPr>
-              <a:t>≈49.8 confirmaciones/s ≈ 24.9 </a:t>
-            </a:r>
-            <a:r>
-              <a:rPr lang="es-ES" b="0" i="0" dirty="0" err="1">
-                <a:effectLst/>
-                <a:latin typeface="anthropic-sans"/>
+              <a:t>FASE 2: CUMPLE </a:t>
+            </a:r>
+            <a:r>
+              <a:rPr lang="es-CO" altLang="es-CO" kern="100" dirty="0">
+                <a:latin typeface="Aptos" panose="020B0004020202020204" pitchFamily="34" charset="0"/>
+                <a:cs typeface="Times New Roman" panose="02020603050405020304" pitchFamily="18" charset="0"/>
+              </a:rPr>
+              <a:t>p95 = 6.60ms sobre 169.232 muestras (≈94 confirmaciones/s ≈ 2.821 </a:t>
+            </a:r>
+            <a:r>
+              <a:rPr lang="es-CO" altLang="es-CO" kern="100" dirty="0" err="1">
+                <a:latin typeface="Aptos" panose="020B0004020202020204" pitchFamily="34" charset="0"/>
+                <a:cs typeface="Times New Roman" panose="02020603050405020304" pitchFamily="18" charset="0"/>
               </a:rPr>
               <a:t>matches</a:t>
             </a:r>
             <a:r>
-              <a:rPr lang="es-ES" b="0" i="0" dirty="0">
-                <a:effectLst/>
-                <a:latin typeface="anthropic-sans"/>
-              </a:rPr>
-              <a:t>/s ≈ 1.494 </a:t>
-            </a:r>
-            <a:r>
-              <a:rPr lang="es-ES" b="0" i="0" dirty="0" err="1">
-                <a:effectLst/>
-                <a:latin typeface="anthropic-sans"/>
-              </a:rPr>
-              <a:t>matches</a:t>
-            </a:r>
-            <a:r>
-              <a:rPr lang="es-ES" b="0" i="0" dirty="0">
-                <a:effectLst/>
-                <a:latin typeface="anthropic-sans"/>
-              </a:rPr>
-              <a:t>/min</a:t>
+              <a:rPr lang="es-CO" altLang="es-CO" kern="100" dirty="0">
+                <a:latin typeface="Aptos" panose="020B0004020202020204" pitchFamily="34" charset="0"/>
+                <a:cs typeface="Times New Roman" panose="02020603050405020304" pitchFamily="18" charset="0"/>
+              </a:rPr>
+              <a:t>/min). También cero muestras por encima de 350ms.</a:t>
+            </a:r>
+          </a:p>
+          <a:p>
+            <a:pPr marL="0" marR="0" lvl="0" indent="0" algn="l" defTabSz="914400" rtl="0" eaLnBrk="0" fontAlgn="base" latinLnBrk="0" hangingPunct="0">
+              <a:lnSpc>
+                <a:spcPct val="100000"/>
+              </a:lnSpc>
+              <a:spcBef>
+                <a:spcPct val="0"/>
+              </a:spcBef>
+              <a:spcAft>
+                <a:spcPct val="0"/>
+              </a:spcAft>
+              <a:buClrTx/>
+              <a:buSzTx/>
+              <a:buFontTx/>
+              <a:buNone/>
+              <a:tabLst/>
+            </a:pPr>
+            <a:endParaRPr lang="es-CO" altLang="es-CO" kern="100" dirty="0">
+              <a:latin typeface="Aptos" panose="020B0004020202020204" pitchFamily="34" charset="0"/>
+              <a:cs typeface="Times New Roman" panose="02020603050405020304" pitchFamily="18" charset="0"/>
+            </a:endParaRPr>
+          </a:p>
+          <a:p>
+            <a:pPr marL="0" marR="0" lvl="0" indent="0" algn="l" defTabSz="914400" rtl="0" eaLnBrk="0" fontAlgn="base" latinLnBrk="0" hangingPunct="0">
+              <a:lnSpc>
+                <a:spcPct val="100000"/>
+              </a:lnSpc>
+              <a:spcBef>
+                <a:spcPct val="0"/>
+              </a:spcBef>
+              <a:spcAft>
+                <a:spcPct val="0"/>
+              </a:spcAft>
+              <a:buClrTx/>
+              <a:buSzTx/>
+              <a:buFontTx/>
+              <a:buNone/>
+              <a:tabLst/>
+            </a:pPr>
+            <a:r>
+              <a:rPr lang="es-CO" altLang="es-CO" kern="100" dirty="0">
+                <a:latin typeface="Aptos" panose="020B0004020202020204" pitchFamily="34" charset="0"/>
+                <a:cs typeface="Times New Roman" panose="02020603050405020304" pitchFamily="18" charset="0"/>
+              </a:rPr>
+              <a:t>El volumen de confirmaciones en Fase 2 fue 4.3 veces mayor que en Fase 1 (169.232 vs 39.272), y sin embargo el p95 no empeoró — mejoró levemente (6.60ms vs 6.71ms). </a:t>
+            </a:r>
+          </a:p>
+          <a:p>
+            <a:pPr marL="0" marR="0" lvl="0" indent="0" algn="l" defTabSz="914400" rtl="0" eaLnBrk="0" fontAlgn="base" latinLnBrk="0" hangingPunct="0">
+              <a:lnSpc>
+                <a:spcPct val="100000"/>
+              </a:lnSpc>
+              <a:spcBef>
+                <a:spcPct val="0"/>
+              </a:spcBef>
+              <a:spcAft>
+                <a:spcPct val="0"/>
+              </a:spcAft>
+              <a:buClrTx/>
+              <a:buSzTx/>
+              <a:buFontTx/>
+              <a:buNone/>
+              <a:tabLst/>
+            </a:pPr>
+            <a:endParaRPr lang="es-CO" altLang="es-CO" kern="100" dirty="0">
+              <a:latin typeface="Aptos" panose="020B0004020202020204" pitchFamily="34" charset="0"/>
+              <a:cs typeface="Times New Roman" panose="02020603050405020304" pitchFamily="18" charset="0"/>
+            </a:endParaRPr>
+          </a:p>
+          <a:p>
+            <a:pPr marL="0" marR="0" lvl="0" indent="0" algn="l" defTabSz="914400" rtl="0" eaLnBrk="0" fontAlgn="base" latinLnBrk="0" hangingPunct="0">
+              <a:lnSpc>
+                <a:spcPct val="100000"/>
+              </a:lnSpc>
+              <a:spcBef>
+                <a:spcPct val="0"/>
+              </a:spcBef>
+              <a:spcAft>
+                <a:spcPct val="0"/>
+              </a:spcAft>
+              <a:buClrTx/>
+              <a:buSzTx/>
+              <a:buFontTx/>
+              <a:buNone/>
+              <a:tabLst/>
+            </a:pPr>
+            <a:r>
+              <a:rPr lang="es-CO" altLang="es-CO" kern="100" dirty="0">
+                <a:latin typeface="Aptos" panose="020B0004020202020204" pitchFamily="34" charset="0"/>
+                <a:cs typeface="Times New Roman" panose="02020603050405020304" pitchFamily="18" charset="0"/>
+              </a:rPr>
+              <a:t>El aislamiento del canal transaccional evita contención con el tráfico de difusión general. Si el canal de confirmaciones compartiera recursos con el resto del sistema, más volumen debería traducirse en más latencia.</a:t>
             </a:r>
           </a:p>
         </p:txBody>
@@ -9013,8 +8903,8 @@
         </p:nvSpPr>
         <p:spPr bwMode="auto">
           <a:xfrm>
-            <a:off x="6183630" y="2091690"/>
-            <a:ext cx="12192000" cy="457200"/>
+            <a:off x="6655664" y="292028"/>
+            <a:ext cx="5536336" cy="2308324"/>
           </a:xfrm>
           <a:prstGeom prst="rect">
             <a:avLst/>
@@ -9054,7 +8944,7 @@
           </a:extLst>
         </p:spPr>
         <p:txBody>
-          <a:bodyPr vert="horz" wrap="none" lIns="91440" tIns="45720" rIns="91440" bIns="45720" numCol="1" anchor="ctr" anchorCtr="0" compatLnSpc="1">
+          <a:bodyPr vert="horz" wrap="square" lIns="91440" tIns="45720" rIns="91440" bIns="45720" numCol="1" anchor="ctr" anchorCtr="0" compatLnSpc="1">
             <a:prstTxWarp prst="textNoShape">
               <a:avLst/>
             </a:prstTxWarp>
@@ -9079,17 +8969,32 @@
               <a:tabLst/>
             </a:pPr>
             <a:r>
-              <a:rPr kumimoji="0" lang="es-CO" altLang="es-CO" sz="900" b="1" i="0" u="none" strike="noStrike" cap="none" normalizeH="0" baseline="0">
-                <a:ln>
-                  <a:noFill/>
-                </a:ln>
-                <a:solidFill>
-                  <a:schemeClr val="tx1"/>
-                </a:solidFill>
-                <a:effectLst/>
-                <a:latin typeface="Arial" panose="020B0604020202020204" pitchFamily="34" charset="0"/>
-              </a:rPr>
-              <a:t>Fase 1 — Por qué cumple</a:t>
+              <a:rPr lang="es-ES" b="1" i="0" dirty="0">
+                <a:effectLst/>
+                <a:latin typeface="anthropic-sans"/>
+              </a:rPr>
+              <a:t>FASE 1: CUMPLE  </a:t>
+            </a:r>
+            <a:r>
+              <a:rPr lang="es-CO" altLang="es-CO" kern="100" dirty="0">
+                <a:latin typeface="Aptos" panose="020B0004020202020204" pitchFamily="34" charset="0"/>
+                <a:cs typeface="Times New Roman" panose="02020603050405020304" pitchFamily="18" charset="0"/>
+              </a:rPr>
+              <a:t>p95 = 6.71ms sobre 39.272 muestras (≈65.5 confirmaciones/s ≈ 1.964 </a:t>
+            </a:r>
+            <a:r>
+              <a:rPr lang="es-CO" altLang="es-CO" kern="100" dirty="0" err="1">
+                <a:latin typeface="Aptos" panose="020B0004020202020204" pitchFamily="34" charset="0"/>
+                <a:cs typeface="Times New Roman" panose="02020603050405020304" pitchFamily="18" charset="0"/>
+              </a:rPr>
+              <a:t>matches</a:t>
+            </a:r>
+            <a:r>
+              <a:rPr lang="es-CO" altLang="es-CO" kern="100" dirty="0">
+                <a:latin typeface="Aptos" panose="020B0004020202020204" pitchFamily="34" charset="0"/>
+                <a:cs typeface="Times New Roman" panose="02020603050405020304" pitchFamily="18" charset="0"/>
+              </a:rPr>
+              <a:t>/min). Cero muestras por encima de 350ms.</a:t>
             </a:r>
           </a:p>
           <a:p>
@@ -9110,552 +9015,54 @@
               <a:tabLst/>
             </a:pPr>
             <a:r>
-              <a:rPr kumimoji="0" lang="es-CO" altLang="es-CO" sz="800" b="1" i="0" u="none" strike="noStrike" cap="none" normalizeH="0" baseline="0">
-                <a:ln>
-                  <a:noFill/>
-                </a:ln>
-                <a:solidFill>
-                  <a:schemeClr val="tx1"/>
-                </a:solidFill>
-                <a:effectLst/>
-                <a:latin typeface="Arial" panose="020B0604020202020204" pitchFamily="34" charset="0"/>
-              </a:rPr>
-              <a:t>Objetivo:</a:t>
-            </a:r>
-            <a:r>
-              <a:rPr kumimoji="0" lang="es-CO" altLang="es-CO" sz="1800" b="0" i="0" u="none" strike="noStrike" cap="none" normalizeH="0" baseline="0">
-                <a:ln>
-                  <a:noFill/>
-                </a:ln>
-                <a:solidFill>
-                  <a:schemeClr val="tx1"/>
-                </a:solidFill>
-                <a:effectLst/>
-                <a:latin typeface="Arial" panose="020B0604020202020204" pitchFamily="34" charset="0"/>
-              </a:rPr>
-              <a:t> ≤350ms (p95), sin pérdida ni duplicación de confirmaciones.</a:t>
-            </a:r>
-          </a:p>
-          <a:p>
-            <a:pPr marL="0" marR="0" lvl="0" indent="0" algn="l" defTabSz="914400" rtl="0" eaLnBrk="0" fontAlgn="base" latinLnBrk="0" hangingPunct="0">
-              <a:lnSpc>
-                <a:spcPct val="100000"/>
-              </a:lnSpc>
-              <a:spcBef>
-                <a:spcPct val="0"/>
-              </a:spcBef>
-              <a:spcAft>
-                <a:spcPct val="0"/>
-              </a:spcAft>
-              <a:buClrTx/>
-              <a:buSzTx/>
-              <a:buFontTx/>
-              <a:buNone/>
-              <a:tabLst/>
-            </a:pPr>
-            <a:r>
-              <a:rPr kumimoji="0" lang="es-CO" altLang="es-CO" sz="1800" b="1" i="0" u="none" strike="noStrike" cap="none" normalizeH="0" baseline="0">
-                <a:ln>
-                  <a:noFill/>
-                </a:ln>
-                <a:solidFill>
-                  <a:schemeClr val="tx1"/>
-                </a:solidFill>
-                <a:effectLst/>
-                <a:latin typeface="Arial" panose="020B0604020202020204" pitchFamily="34" charset="0"/>
-              </a:rPr>
-              <a:t>Resultado real del CSV:</a:t>
-            </a:r>
-            <a:r>
-              <a:rPr kumimoji="0" lang="es-CO" altLang="es-CO" sz="1800" b="0" i="0" u="none" strike="noStrike" cap="none" normalizeH="0" baseline="0">
-                <a:ln>
-                  <a:noFill/>
-                </a:ln>
-                <a:solidFill>
-                  <a:schemeClr val="tx1"/>
-                </a:solidFill>
-                <a:effectLst/>
-                <a:latin typeface="Arial" panose="020B0604020202020204" pitchFamily="34" charset="0"/>
-              </a:rPr>
-              <a:t> p95 = 6.71ms sobre 39.272 muestras (≈65.5 confirmaciones/s ≈ 1.964 matches/min). </a:t>
-            </a:r>
-            <a:r>
-              <a:rPr kumimoji="0" lang="es-CO" altLang="es-CO" sz="1800" b="1" i="0" u="none" strike="noStrike" cap="none" normalizeH="0" baseline="0">
-                <a:ln>
-                  <a:noFill/>
-                </a:ln>
-                <a:solidFill>
-                  <a:schemeClr val="tx1"/>
-                </a:solidFill>
-                <a:effectLst/>
-                <a:latin typeface="Arial" panose="020B0604020202020204" pitchFamily="34" charset="0"/>
-              </a:rPr>
-              <a:t>Cero</a:t>
-            </a:r>
-            <a:r>
-              <a:rPr kumimoji="0" lang="es-CO" altLang="es-CO" sz="1800" b="0" i="0" u="none" strike="noStrike" cap="none" normalizeH="0" baseline="0">
-                <a:ln>
-                  <a:noFill/>
-                </a:ln>
-                <a:solidFill>
-                  <a:schemeClr val="tx1"/>
-                </a:solidFill>
-                <a:effectLst/>
-                <a:latin typeface="Arial" panose="020B0604020202020204" pitchFamily="34" charset="0"/>
-              </a:rPr>
-              <a:t> muestras por encima de 350ms.</a:t>
-            </a:r>
-          </a:p>
-          <a:p>
-            <a:pPr marL="0" marR="0" lvl="0" indent="0" algn="l" defTabSz="914400" rtl="0" eaLnBrk="0" fontAlgn="base" latinLnBrk="0" hangingPunct="0">
-              <a:lnSpc>
-                <a:spcPct val="100000"/>
-              </a:lnSpc>
-              <a:spcBef>
-                <a:spcPct val="0"/>
-              </a:spcBef>
-              <a:spcAft>
-                <a:spcPct val="0"/>
-              </a:spcAft>
-              <a:buClrTx/>
-              <a:buSzTx/>
-              <a:buFontTx/>
-              <a:buNone/>
-              <a:tabLst/>
-            </a:pPr>
-            <a:r>
-              <a:rPr kumimoji="0" lang="es-CO" altLang="es-CO" sz="1800" b="1" i="0" u="none" strike="noStrike" cap="none" normalizeH="0" baseline="0">
-                <a:ln>
-                  <a:noFill/>
-                </a:ln>
-                <a:solidFill>
-                  <a:schemeClr val="tx1"/>
-                </a:solidFill>
-                <a:effectLst/>
-                <a:latin typeface="Arial" panose="020B0604020202020204" pitchFamily="34" charset="0"/>
-              </a:rPr>
-              <a:t>Por qué cumple:</a:t>
-            </a:r>
-            <a:r>
-              <a:rPr kumimoji="0" lang="es-CO" altLang="es-CO" sz="1800" b="0" i="0" u="none" strike="noStrike" cap="none" normalizeH="0" baseline="0">
-                <a:ln>
-                  <a:noFill/>
-                </a:ln>
-                <a:solidFill>
-                  <a:schemeClr val="tx1"/>
-                </a:solidFill>
-                <a:effectLst/>
-                <a:latin typeface="Arial" panose="020B0604020202020204" pitchFamily="34" charset="0"/>
-              </a:rPr>
-              <a:t> 6.71ms está </a:t>
-            </a:r>
-            <a:r>
-              <a:rPr kumimoji="0" lang="es-CO" altLang="es-CO" sz="1800" b="1" i="0" u="none" strike="noStrike" cap="none" normalizeH="0" baseline="0">
-                <a:ln>
-                  <a:noFill/>
-                </a:ln>
-                <a:solidFill>
-                  <a:schemeClr val="tx1"/>
-                </a:solidFill>
-                <a:effectLst/>
-                <a:latin typeface="Arial" panose="020B0604020202020204" pitchFamily="34" charset="0"/>
-              </a:rPr>
-              <a:t>52 veces</a:t>
-            </a:r>
-            <a:r>
-              <a:rPr kumimoji="0" lang="es-CO" altLang="es-CO" sz="1800" b="0" i="0" u="none" strike="noStrike" cap="none" normalizeH="0" baseline="0">
-                <a:ln>
-                  <a:noFill/>
-                </a:ln>
-                <a:solidFill>
-                  <a:schemeClr val="tx1"/>
-                </a:solidFill>
-                <a:effectLst/>
-                <a:latin typeface="Arial" panose="020B0604020202020204" pitchFamily="34" charset="0"/>
-              </a:rPr>
-              <a:t> por debajo del límite de 350ms. Con este volumen (línea base), cada uno de los tres tramos del canal transaccional —match en memoria, publicación al exchange dedicado </a:t>
-            </a:r>
-            <a:r>
-              <a:rPr kumimoji="0" lang="es-CO" altLang="es-CO" sz="1000" b="0" i="0" u="none" strike="noStrike" cap="none" normalizeH="0" baseline="0">
-                <a:ln>
-                  <a:noFill/>
-                </a:ln>
-                <a:solidFill>
-                  <a:schemeClr val="tx1"/>
-                </a:solidFill>
-                <a:effectLst/>
-                <a:latin typeface="Arial Unicode MS"/>
+              <a:rPr lang="es-CO" altLang="es-CO" kern="100" dirty="0">
+                <a:latin typeface="Aptos" panose="020B0004020202020204" pitchFamily="34" charset="0"/>
+                <a:cs typeface="Times New Roman" panose="02020603050405020304" pitchFamily="18" charset="0"/>
+              </a:rPr>
+              <a:t>Con este volumen, cada uno de los tres tramos del canal transaccional, publicación al </a:t>
+            </a:r>
+            <a:r>
+              <a:rPr lang="es-CO" altLang="es-CO" kern="100" dirty="0" err="1">
+                <a:latin typeface="Aptos" panose="020B0004020202020204" pitchFamily="34" charset="0"/>
+                <a:cs typeface="Times New Roman" panose="02020603050405020304" pitchFamily="18" charset="0"/>
+              </a:rPr>
+              <a:t>exchange</a:t>
+            </a:r>
+            <a:r>
+              <a:rPr lang="es-CO" altLang="es-CO" kern="100" dirty="0">
+                <a:latin typeface="Aptos" panose="020B0004020202020204" pitchFamily="34" charset="0"/>
+                <a:cs typeface="Times New Roman" panose="02020603050405020304" pitchFamily="18" charset="0"/>
+              </a:rPr>
+              <a:t> dedicado </a:t>
+            </a:r>
+            <a:r>
+              <a:rPr lang="es-CO" altLang="es-CO" kern="100" dirty="0" err="1">
+                <a:latin typeface="Aptos" panose="020B0004020202020204" pitchFamily="34" charset="0"/>
+                <a:cs typeface="Times New Roman" panose="02020603050405020304" pitchFamily="18" charset="0"/>
               </a:rPr>
               <a:t>trade_events</a:t>
             </a:r>
             <a:r>
-              <a:rPr kumimoji="0" lang="es-CO" altLang="es-CO" sz="800" b="0" i="0" u="none" strike="noStrike" cap="none" normalizeH="0" baseline="0">
-                <a:ln>
-                  <a:noFill/>
-                </a:ln>
-                <a:solidFill>
-                  <a:schemeClr val="tx1"/>
-                </a:solidFill>
-                <a:effectLst/>
-              </a:rPr>
-              <a:t>, verificación de idempotencia en Redis y entrega por WebSocket ya conectado— tiene margen de sobra para completarse en milisegundos porque no compite por recursos con nada más. El p50 de 3.34ms te dice que la mitad de las confirmaciones llegaron en poco más de 3 milisegundos; el p95 de 6.71ms solo refleja la cola alta, no lo típico.</a:t>
-            </a:r>
-            <a:endParaRPr kumimoji="0" lang="es-CO" altLang="es-CO" sz="900" b="1" i="0" u="none" strike="noStrike" cap="none" normalizeH="0" baseline="0">
-              <a:ln>
-                <a:noFill/>
-              </a:ln>
-              <a:solidFill>
-                <a:schemeClr val="tx1"/>
-              </a:solidFill>
-              <a:effectLst/>
-              <a:latin typeface="Arial" panose="020B0604020202020204" pitchFamily="34" charset="0"/>
-            </a:endParaRPr>
-          </a:p>
-          <a:p>
-            <a:pPr marL="0" marR="0" lvl="0" indent="0" algn="l" defTabSz="914400" rtl="0" eaLnBrk="0" fontAlgn="base" latinLnBrk="0" hangingPunct="0">
-              <a:lnSpc>
-                <a:spcPct val="100000"/>
-              </a:lnSpc>
-              <a:spcBef>
-                <a:spcPct val="0"/>
-              </a:spcBef>
-              <a:spcAft>
-                <a:spcPct val="0"/>
-              </a:spcAft>
-              <a:buClrTx/>
-              <a:buSzTx/>
-              <a:buFontTx/>
-              <a:buNone/>
-              <a:tabLst/>
-            </a:pPr>
-            <a:r>
-              <a:rPr kumimoji="0" lang="es-CO" altLang="es-CO" sz="900" b="1" i="0" u="none" strike="noStrike" cap="none" normalizeH="0" baseline="0">
-                <a:ln>
-                  <a:noFill/>
-                </a:ln>
-                <a:solidFill>
-                  <a:schemeClr val="tx1"/>
-                </a:solidFill>
-                <a:effectLst/>
-                <a:latin typeface="Arial" panose="020B0604020202020204" pitchFamily="34" charset="0"/>
-              </a:rPr>
-              <a:t>Fase 2 — Por qué cumple (y por qué es el dato más contundente)</a:t>
-            </a:r>
-          </a:p>
-          <a:p>
-            <a:pPr marL="0" marR="0" lvl="0" indent="0" algn="l" defTabSz="914400" rtl="0" eaLnBrk="0" fontAlgn="base" latinLnBrk="0" hangingPunct="0">
-              <a:lnSpc>
-                <a:spcPct val="100000"/>
-              </a:lnSpc>
-              <a:spcBef>
-                <a:spcPct val="0"/>
-              </a:spcBef>
-              <a:spcAft>
-                <a:spcPct val="0"/>
-              </a:spcAft>
-              <a:buClrTx/>
-              <a:buSzTx/>
-              <a:buFontTx/>
-              <a:buNone/>
-              <a:tabLst/>
-            </a:pPr>
-            <a:r>
-              <a:rPr kumimoji="0" lang="es-CO" altLang="es-CO" sz="800" b="1" i="0" u="none" strike="noStrike" cap="none" normalizeH="0" baseline="0">
-                <a:ln>
-                  <a:noFill/>
-                </a:ln>
-                <a:solidFill>
-                  <a:schemeClr val="tx1"/>
-                </a:solidFill>
-                <a:effectLst/>
-                <a:latin typeface="Arial" panose="020B0604020202020204" pitchFamily="34" charset="0"/>
-              </a:rPr>
-              <a:t>Objetivo:</a:t>
-            </a:r>
-            <a:r>
-              <a:rPr kumimoji="0" lang="es-CO" altLang="es-CO" sz="1800" b="0" i="0" u="none" strike="noStrike" cap="none" normalizeH="0" baseline="0">
-                <a:ln>
-                  <a:noFill/>
-                </a:ln>
-                <a:solidFill>
-                  <a:schemeClr val="tx1"/>
-                </a:solidFill>
-                <a:effectLst/>
-                <a:latin typeface="Arial" panose="020B0604020202020204" pitchFamily="34" charset="0"/>
-              </a:rPr>
-              <a:t> lo mismo, ≤350ms p95, pero sostenido durante 30 minutos bajo el pico.</a:t>
-            </a:r>
-          </a:p>
-          <a:p>
-            <a:pPr marL="0" marR="0" lvl="0" indent="0" algn="l" defTabSz="914400" rtl="0" eaLnBrk="0" fontAlgn="base" latinLnBrk="0" hangingPunct="0">
-              <a:lnSpc>
-                <a:spcPct val="100000"/>
-              </a:lnSpc>
-              <a:spcBef>
-                <a:spcPct val="0"/>
-              </a:spcBef>
-              <a:spcAft>
-                <a:spcPct val="0"/>
-              </a:spcAft>
-              <a:buClrTx/>
-              <a:buSzTx/>
-              <a:buFontTx/>
-              <a:buNone/>
-              <a:tabLst/>
-            </a:pPr>
-            <a:r>
-              <a:rPr kumimoji="0" lang="es-CO" altLang="es-CO" sz="1800" b="1" i="0" u="none" strike="noStrike" cap="none" normalizeH="0" baseline="0">
-                <a:ln>
-                  <a:noFill/>
-                </a:ln>
-                <a:solidFill>
-                  <a:schemeClr val="tx1"/>
-                </a:solidFill>
-                <a:effectLst/>
-                <a:latin typeface="Arial" panose="020B0604020202020204" pitchFamily="34" charset="0"/>
-              </a:rPr>
-              <a:t>Resultado real del CSV:</a:t>
-            </a:r>
-            <a:r>
-              <a:rPr kumimoji="0" lang="es-CO" altLang="es-CO" sz="1800" b="0" i="0" u="none" strike="noStrike" cap="none" normalizeH="0" baseline="0">
-                <a:ln>
-                  <a:noFill/>
-                </a:ln>
-                <a:solidFill>
-                  <a:schemeClr val="tx1"/>
-                </a:solidFill>
-                <a:effectLst/>
-                <a:latin typeface="Arial" panose="020B0604020202020204" pitchFamily="34" charset="0"/>
-              </a:rPr>
-              <a:t> p95 = 6.60ms sobre 169.232 muestras (≈94 confirmaciones/s ≈ 2.821 matches/min). También </a:t>
-            </a:r>
-            <a:r>
-              <a:rPr kumimoji="0" lang="es-CO" altLang="es-CO" sz="1800" b="1" i="0" u="none" strike="noStrike" cap="none" normalizeH="0" baseline="0">
-                <a:ln>
-                  <a:noFill/>
-                </a:ln>
-                <a:solidFill>
-                  <a:schemeClr val="tx1"/>
-                </a:solidFill>
-                <a:effectLst/>
-                <a:latin typeface="Arial" panose="020B0604020202020204" pitchFamily="34" charset="0"/>
-              </a:rPr>
-              <a:t>cero</a:t>
-            </a:r>
-            <a:r>
-              <a:rPr kumimoji="0" lang="es-CO" altLang="es-CO" sz="1800" b="0" i="0" u="none" strike="noStrike" cap="none" normalizeH="0" baseline="0">
-                <a:ln>
-                  <a:noFill/>
-                </a:ln>
-                <a:solidFill>
-                  <a:schemeClr val="tx1"/>
-                </a:solidFill>
-                <a:effectLst/>
-                <a:latin typeface="Arial" panose="020B0604020202020204" pitchFamily="34" charset="0"/>
-              </a:rPr>
-              <a:t> muestras por encima de 350ms.</a:t>
-            </a:r>
-          </a:p>
-          <a:p>
-            <a:pPr marL="0" marR="0" lvl="0" indent="0" algn="l" defTabSz="914400" rtl="0" eaLnBrk="0" fontAlgn="base" latinLnBrk="0" hangingPunct="0">
-              <a:lnSpc>
-                <a:spcPct val="100000"/>
-              </a:lnSpc>
-              <a:spcBef>
-                <a:spcPct val="0"/>
-              </a:spcBef>
-              <a:spcAft>
-                <a:spcPct val="0"/>
-              </a:spcAft>
-              <a:buClrTx/>
-              <a:buSzTx/>
-              <a:buFontTx/>
-              <a:buNone/>
-              <a:tabLst/>
-            </a:pPr>
-            <a:r>
-              <a:rPr kumimoji="0" lang="es-CO" altLang="es-CO" sz="1800" b="1" i="0" u="none" strike="noStrike" cap="none" normalizeH="0" baseline="0">
-                <a:ln>
-                  <a:noFill/>
-                </a:ln>
-                <a:solidFill>
-                  <a:schemeClr val="tx1"/>
-                </a:solidFill>
-                <a:effectLst/>
-                <a:latin typeface="Arial" panose="020B0604020202020204" pitchFamily="34" charset="0"/>
-              </a:rPr>
-              <a:t>Por qué cumple:</a:t>
-            </a:r>
-            <a:r>
-              <a:rPr kumimoji="0" lang="es-CO" altLang="es-CO" sz="1800" b="0" i="0" u="none" strike="noStrike" cap="none" normalizeH="0" baseline="0">
-                <a:ln>
-                  <a:noFill/>
-                </a:ln>
-                <a:solidFill>
-                  <a:schemeClr val="tx1"/>
-                </a:solidFill>
-                <a:effectLst/>
-                <a:latin typeface="Arial" panose="020B0604020202020204" pitchFamily="34" charset="0"/>
-              </a:rPr>
-              <a:t> aquí está el punto central de la hipótesis. El volumen de confirmaciones en Fase 2 fue </a:t>
-            </a:r>
-            <a:r>
-              <a:rPr kumimoji="0" lang="es-CO" altLang="es-CO" sz="1800" b="1" i="0" u="none" strike="noStrike" cap="none" normalizeH="0" baseline="0">
-                <a:ln>
-                  <a:noFill/>
-                </a:ln>
-                <a:solidFill>
-                  <a:schemeClr val="tx1"/>
-                </a:solidFill>
-                <a:effectLst/>
-                <a:latin typeface="Arial" panose="020B0604020202020204" pitchFamily="34" charset="0"/>
-              </a:rPr>
-              <a:t>4.3 veces mayor</a:t>
-            </a:r>
-            <a:r>
-              <a:rPr kumimoji="0" lang="es-CO" altLang="es-CO" sz="1800" b="0" i="0" u="none" strike="noStrike" cap="none" normalizeH="0" baseline="0">
-                <a:ln>
-                  <a:noFill/>
-                </a:ln>
-                <a:solidFill>
-                  <a:schemeClr val="tx1"/>
-                </a:solidFill>
-                <a:effectLst/>
-                <a:latin typeface="Arial" panose="020B0604020202020204" pitchFamily="34" charset="0"/>
-              </a:rPr>
-              <a:t> que en Fase 1 (169.232 vs 39.272), y sin embargo el p95 </a:t>
-            </a:r>
-            <a:r>
-              <a:rPr kumimoji="0" lang="es-CO" altLang="es-CO" sz="1800" b="1" i="0" u="none" strike="noStrike" cap="none" normalizeH="0" baseline="0">
-                <a:ln>
-                  <a:noFill/>
-                </a:ln>
-                <a:solidFill>
-                  <a:schemeClr val="tx1"/>
-                </a:solidFill>
-                <a:effectLst/>
-                <a:latin typeface="Arial" panose="020B0604020202020204" pitchFamily="34" charset="0"/>
-              </a:rPr>
-              <a:t>no empeoró — mejoró levemente</a:t>
-            </a:r>
-            <a:r>
-              <a:rPr kumimoji="0" lang="es-CO" altLang="es-CO" sz="1800" b="0" i="0" u="none" strike="noStrike" cap="none" normalizeH="0" baseline="0">
-                <a:ln>
-                  <a:noFill/>
-                </a:ln>
-                <a:solidFill>
-                  <a:schemeClr val="tx1"/>
-                </a:solidFill>
-                <a:effectLst/>
-                <a:latin typeface="Arial" panose="020B0604020202020204" pitchFamily="34" charset="0"/>
-              </a:rPr>
-              <a:t> (6.60ms vs 6.71ms). Eso es exactamente lo que predice la causa que plantea la hipótesis: </a:t>
-            </a:r>
-            <a:r>
-              <a:rPr kumimoji="0" lang="es-CO" altLang="es-CO" sz="1800" b="0" i="1" u="none" strike="noStrike" cap="none" normalizeH="0" baseline="0">
-                <a:ln>
-                  <a:noFill/>
-                </a:ln>
-                <a:solidFill>
-                  <a:schemeClr val="tx1"/>
-                </a:solidFill>
-                <a:effectLst/>
-                <a:latin typeface="Arial" panose="020B0604020202020204" pitchFamily="34" charset="0"/>
-              </a:rPr>
-              <a:t>"el aislamiento del canal transaccional evita contención con el tráfico de difusión general"</a:t>
-            </a:r>
-            <a:r>
-              <a:rPr kumimoji="0" lang="es-CO" altLang="es-CO" sz="1800" b="0" i="0" u="none" strike="noStrike" cap="none" normalizeH="0" baseline="0">
-                <a:ln>
-                  <a:noFill/>
-                </a:ln>
-                <a:solidFill>
-                  <a:schemeClr val="tx1"/>
-                </a:solidFill>
-                <a:effectLst/>
-                <a:latin typeface="Arial" panose="020B0604020202020204" pitchFamily="34" charset="0"/>
-              </a:rPr>
-              <a:t>. Si el canal de confirmaciones compartiera recursos con el resto del sistema, más volumen debería traducirse en más latencia — aquí no pasó, lo cual es evidencia de que el aislamiento realmente está haciendo su trabajo, no solo en teoría sino con datos.</a:t>
-            </a:r>
-          </a:p>
-          <a:p>
-            <a:pPr marL="0" marR="0" lvl="0" indent="0" algn="l" defTabSz="914400" rtl="0" eaLnBrk="0" fontAlgn="base" latinLnBrk="0" hangingPunct="0">
-              <a:lnSpc>
-                <a:spcPct val="100000"/>
-              </a:lnSpc>
-              <a:spcBef>
-                <a:spcPct val="0"/>
-              </a:spcBef>
-              <a:spcAft>
-                <a:spcPct val="0"/>
-              </a:spcAft>
-              <a:buClrTx/>
-              <a:buSzTx/>
-              <a:buFontTx/>
-              <a:buNone/>
-              <a:tabLst/>
-            </a:pPr>
-            <a:r>
-              <a:rPr kumimoji="0" lang="es-CO" altLang="es-CO" sz="1800" b="1" i="0" u="none" strike="noStrike" cap="none" normalizeH="0" baseline="0">
-                <a:ln>
-                  <a:noFill/>
-                </a:ln>
-                <a:solidFill>
-                  <a:schemeClr val="tx1"/>
-                </a:solidFill>
-                <a:effectLst/>
-                <a:latin typeface="Arial" panose="020B0604020202020204" pitchFamily="34" charset="0"/>
-              </a:rPr>
-              <a:t>Un detalle que vale la pena mencionar en tu informe:</a:t>
-            </a:r>
-            <a:r>
-              <a:rPr kumimoji="0" lang="es-CO" altLang="es-CO" sz="1800" b="0" i="0" u="none" strike="noStrike" cap="none" normalizeH="0" baseline="0">
-                <a:ln>
-                  <a:noFill/>
-                </a:ln>
-                <a:solidFill>
-                  <a:schemeClr val="tx1"/>
-                </a:solidFill>
-                <a:effectLst/>
-                <a:latin typeface="Arial" panose="020B0604020202020204" pitchFamily="34" charset="0"/>
-              </a:rPr>
-              <a:t> el </a:t>
-            </a:r>
-            <a:r>
-              <a:rPr kumimoji="0" lang="es-CO" altLang="es-CO" sz="1000" b="0" i="0" u="none" strike="noStrike" cap="none" normalizeH="0" baseline="0">
-                <a:ln>
-                  <a:noFill/>
-                </a:ln>
-                <a:solidFill>
-                  <a:schemeClr val="tx1"/>
-                </a:solidFill>
-                <a:effectLst/>
-                <a:latin typeface="Arial Unicode MS"/>
-              </a:rPr>
-              <a:t>max</a:t>
-            </a:r>
-            <a:r>
-              <a:rPr kumimoji="0" lang="es-CO" altLang="es-CO" sz="800" b="0" i="0" u="none" strike="noStrike" cap="none" normalizeH="0" baseline="0">
-                <a:ln>
-                  <a:noFill/>
-                </a:ln>
-                <a:solidFill>
-                  <a:schemeClr val="tx1"/>
-                </a:solidFill>
-                <a:effectLst/>
-              </a:rPr>
-              <a:t> de esta corrida (277ms en Fase 2, según lo que verificamos) sigue estando por debajo de los 350ms del objetivo — a diferencia de corridas anteriores donde el máximo absoluto sí superaba el límite puntualmente (sin afectar el p95). Esta corrida en particular no tuvo ni un solo caso individual fuera del umbral, lo cual la hace tu evidencia más limpia hasta ahora.</a:t>
-            </a:r>
-            <a:endParaRPr kumimoji="0" lang="es-CO" altLang="es-CO" sz="1800" b="0" i="0" u="none" strike="noStrike" cap="none" normalizeH="0" baseline="0">
-              <a:ln>
-                <a:noFill/>
-              </a:ln>
-              <a:solidFill>
-                <a:schemeClr val="tx1"/>
-              </a:solidFill>
-              <a:effectLst/>
-              <a:latin typeface="Arial" panose="020B0604020202020204" pitchFamily="34" charset="0"/>
-            </a:endParaRPr>
+              <a:rPr lang="es-CO" altLang="es-CO" kern="100" dirty="0">
+                <a:latin typeface="Aptos" panose="020B0004020202020204" pitchFamily="34" charset="0"/>
+                <a:cs typeface="Times New Roman" panose="02020603050405020304" pitchFamily="18" charset="0"/>
+              </a:rPr>
+              <a:t>, verificación de idempotencia en Redis y entrega por </a:t>
+            </a:r>
+            <a:r>
+              <a:rPr lang="es-CO" altLang="es-CO" kern="100" dirty="0" err="1">
+                <a:latin typeface="Aptos" panose="020B0004020202020204" pitchFamily="34" charset="0"/>
+                <a:cs typeface="Times New Roman" panose="02020603050405020304" pitchFamily="18" charset="0"/>
+              </a:rPr>
+              <a:t>WebSocket</a:t>
+            </a:r>
+            <a:r>
+              <a:rPr lang="es-CO" altLang="es-CO" kern="100" dirty="0">
+                <a:latin typeface="Aptos" panose="020B0004020202020204" pitchFamily="34" charset="0"/>
+                <a:cs typeface="Times New Roman" panose="02020603050405020304" pitchFamily="18" charset="0"/>
+              </a:rPr>
+              <a:t> no compite por recursos con nada más.</a:t>
+            </a:r>
           </a:p>
         </p:txBody>
       </p:sp>
